--- a/youtube-slides/若年ミオクロニーてんかん/JME_スライド.pptx
+++ b/youtube-slides/若年ミオクロニーてんかん/JME_スライド.pptx
@@ -2275,17 +2275,17 @@
               <a:buNone/>
             </a:pPr>
             <a:r>
-              <a:rPr lang="en-US" sz="4200" b="1" dirty="0">
+              <a:rPr lang="en-US" sz="4000" b="1" dirty="0">
                 <a:solidFill>
                   <a:srgbClr val="FFFFFF"/>
                 </a:solidFill>
-                <a:latin typeface="Arial Black" pitchFamily="34" charset="0"/>
-                <a:ea typeface="Arial Black" pitchFamily="34" charset="-122"/>
-                <a:cs typeface="Arial Black" pitchFamily="34" charset="-120"/>
+                <a:latin typeface="BIZ UDPGothic" pitchFamily="34" charset="0"/>
+                <a:ea typeface="BIZ UDPGothic" pitchFamily="34" charset="-122"/>
+                <a:cs typeface="BIZ UDPGothic" pitchFamily="34" charset="-120"/>
               </a:rPr>
               <a:t>若年ミオクロニーてんかん</a:t>
             </a:r>
-            <a:endParaRPr lang="en-US" sz="4200" dirty="0"/>
+            <a:endParaRPr lang="en-US" sz="4000" dirty="0"/>
           </a:p>
         </p:txBody>
       </p:sp>
@@ -2318,9 +2318,9 @@
                 <a:solidFill>
                   <a:srgbClr val="4A90D9"/>
                 </a:solidFill>
-                <a:latin typeface="Arial" pitchFamily="34" charset="0"/>
-                <a:ea typeface="Arial" pitchFamily="34" charset="-122"/>
-                <a:cs typeface="Arial" pitchFamily="34" charset="-120"/>
+                <a:latin typeface="Segoe UI" pitchFamily="34" charset="0"/>
+                <a:ea typeface="Segoe UI" pitchFamily="34" charset="-122"/>
+                <a:cs typeface="Segoe UI" pitchFamily="34" charset="-120"/>
               </a:rPr>
               <a:t>Juvenile Myoclonic Epilepsy (JME)</a:t>
             </a:r>
@@ -2357,9 +2357,9 @@
                 <a:solidFill>
                   <a:srgbClr val="4A90D9"/>
                 </a:solidFill>
-                <a:latin typeface="Arial" pitchFamily="34" charset="0"/>
-                <a:ea typeface="Arial" pitchFamily="34" charset="-122"/>
-                <a:cs typeface="Arial" pitchFamily="34" charset="-120"/>
+                <a:latin typeface="BIZ UDPGothic" pitchFamily="34" charset="0"/>
+                <a:ea typeface="BIZ UDPGothic" pitchFamily="34" charset="-122"/>
+                <a:cs typeface="BIZ UDPGothic" pitchFamily="34" charset="-120"/>
               </a:rPr>
               <a:t>― 見逃されやすい思春期てんかんの診断と治療 ―</a:t>
             </a:r>
@@ -2419,9 +2419,9 @@
                 <a:solidFill>
                   <a:srgbClr val="E8F0FE"/>
                 </a:solidFill>
-                <a:latin typeface="Arial" pitchFamily="34" charset="0"/>
-                <a:ea typeface="Arial" pitchFamily="34" charset="-122"/>
-                <a:cs typeface="Arial" pitchFamily="34" charset="-120"/>
+                <a:latin typeface="BIZ UDPGothic" pitchFamily="34" charset="0"/>
+                <a:ea typeface="BIZ UDPGothic" pitchFamily="34" charset="-122"/>
+                <a:cs typeface="BIZ UDPGothic" pitchFamily="34" charset="-120"/>
               </a:rPr>
               <a:t>医知創造ラボ  今村久司</a:t>
             </a:r>
@@ -2458,9 +2458,9 @@
                 <a:solidFill>
                   <a:srgbClr val="636E72"/>
                 </a:solidFill>
-                <a:latin typeface="Arial" pitchFamily="34" charset="0"/>
-                <a:ea typeface="Arial" pitchFamily="34" charset="-122"/>
-                <a:cs typeface="Arial" pitchFamily="34" charset="-120"/>
+                <a:latin typeface="BIZ UDPGothic" pitchFamily="34" charset="0"/>
+                <a:ea typeface="BIZ UDPGothic" pitchFamily="34" charset="-122"/>
+                <a:cs typeface="BIZ UDPGothic" pitchFamily="34" charset="-120"/>
               </a:rPr>
               <a:t>2025年最新メタアナリシス・コホート研究に基づく</a:t>
             </a:r>
@@ -2545,17 +2545,17 @@
               <a:buNone/>
             </a:pPr>
             <a:r>
-              <a:rPr lang="en-US" sz="2800" b="1" dirty="0">
+              <a:rPr lang="en-US" sz="2400" b="1" dirty="0">
                 <a:solidFill>
                   <a:srgbClr val="FFFFFF"/>
                 </a:solidFill>
-                <a:latin typeface="Arial Black" pitchFamily="34" charset="0"/>
-                <a:ea typeface="Arial Black" pitchFamily="34" charset="-122"/>
-                <a:cs typeface="Arial Black" pitchFamily="34" charset="-120"/>
+                <a:latin typeface="BIZ UDPGothic" pitchFamily="34" charset="0"/>
+                <a:ea typeface="BIZ UDPGothic" pitchFamily="34" charset="-122"/>
+                <a:cs typeface="BIZ UDPGothic" pitchFamily="34" charset="-120"/>
               </a:rPr>
               <a:t>妊娠可能女性の治療アルゴリズム</a:t>
             </a:r>
-            <a:endParaRPr lang="en-US" sz="2800" dirty="0"/>
+            <a:endParaRPr lang="en-US" sz="2400" dirty="0"/>
           </a:p>
         </p:txBody>
       </p:sp>
@@ -2635,9 +2635,9 @@
                 <a:solidFill>
                   <a:srgbClr val="FFFFFF"/>
                 </a:solidFill>
-                <a:latin typeface="Arial" pitchFamily="34" charset="0"/>
-                <a:ea typeface="Arial" pitchFamily="34" charset="-122"/>
-                <a:cs typeface="Arial" pitchFamily="34" charset="-120"/>
+                <a:latin typeface="BIZ UDPGothic" pitchFamily="34" charset="0"/>
+                <a:ea typeface="BIZ UDPGothic" pitchFamily="34" charset="-122"/>
+                <a:cs typeface="BIZ UDPGothic" pitchFamily="34" charset="-120"/>
               </a:rPr>
               <a:t>妊娠可能女性の JME</a:t>
             </a:r>
@@ -2694,9 +2694,9 @@
                 <a:solidFill>
                   <a:srgbClr val="FFFFFF"/>
                 </a:solidFill>
-                <a:latin typeface="Arial" pitchFamily="34" charset="0"/>
-                <a:ea typeface="Arial" pitchFamily="34" charset="-122"/>
-                <a:cs typeface="Arial" pitchFamily="34" charset="-120"/>
+                <a:latin typeface="BIZ UDPGothic" pitchFamily="34" charset="0"/>
+                <a:ea typeface="BIZ UDPGothic" pitchFamily="34" charset="-122"/>
+                <a:cs typeface="BIZ UDPGothic" pitchFamily="34" charset="-120"/>
               </a:rPr>
               <a:t>第一選択: レベチラセタム（LEV）</a:t>
             </a:r>
@@ -2753,9 +2753,9 @@
                 <a:solidFill>
                   <a:srgbClr val="FFFFFF"/>
                 </a:solidFill>
-                <a:latin typeface="Arial" pitchFamily="34" charset="0"/>
-                <a:ea typeface="Arial" pitchFamily="34" charset="-122"/>
-                <a:cs typeface="Arial" pitchFamily="34" charset="-120"/>
+                <a:latin typeface="BIZ UDPGothic" pitchFamily="34" charset="0"/>
+                <a:ea typeface="BIZ UDPGothic" pitchFamily="34" charset="-122"/>
+                <a:cs typeface="BIZ UDPGothic" pitchFamily="34" charset="-120"/>
               </a:rPr>
               <a:t>LEV無効 or 精神症状で忍容不可</a:t>
             </a:r>
@@ -2812,9 +2812,9 @@
                 <a:solidFill>
                   <a:srgbClr val="FFFFFF"/>
                 </a:solidFill>
-                <a:latin typeface="Arial" pitchFamily="34" charset="0"/>
-                <a:ea typeface="Arial" pitchFamily="34" charset="-122"/>
-                <a:cs typeface="Arial" pitchFamily="34" charset="-120"/>
+                <a:latin typeface="BIZ UDPGothic" pitchFamily="34" charset="0"/>
+                <a:ea typeface="BIZ UDPGothic" pitchFamily="34" charset="-122"/>
+                <a:cs typeface="BIZ UDPGothic" pitchFamily="34" charset="-120"/>
               </a:rPr>
               <a:t>ラモトリギン（漸増）or ゾニサミド</a:t>
             </a:r>
@@ -2871,9 +2871,9 @@
                 <a:solidFill>
                   <a:srgbClr val="FFFFFF"/>
                 </a:solidFill>
-                <a:latin typeface="Arial" pitchFamily="34" charset="0"/>
-                <a:ea typeface="Arial" pitchFamily="34" charset="-122"/>
-                <a:cs typeface="Arial" pitchFamily="34" charset="-120"/>
+                <a:latin typeface="BIZ UDPGothic" pitchFamily="34" charset="0"/>
+                <a:ea typeface="BIZ UDPGothic" pitchFamily="34" charset="-122"/>
+                <a:cs typeface="BIZ UDPGothic" pitchFamily="34" charset="-120"/>
               </a:rPr>
               <a:t>ブリバラセタム or ペランパネル追加</a:t>
             </a:r>
@@ -2910,9 +2910,9 @@
                 <a:solidFill>
                   <a:srgbClr val="2C5AA0"/>
                 </a:solidFill>
-                <a:latin typeface="Arial" pitchFamily="34" charset="0"/>
-                <a:ea typeface="Arial" pitchFamily="34" charset="-122"/>
-                <a:cs typeface="Arial" pitchFamily="34" charset="-120"/>
+                <a:latin typeface="BIZ UDPGothic" pitchFamily="34" charset="0"/>
+                <a:ea typeface="BIZ UDPGothic" pitchFamily="34" charset="-122"/>
+                <a:cs typeface="BIZ UDPGothic" pitchFamily="34" charset="-120"/>
               </a:rPr>
               <a:t>▼</a:t>
             </a:r>
@@ -2949,9 +2949,9 @@
                 <a:solidFill>
                   <a:srgbClr val="2C5AA0"/>
                 </a:solidFill>
-                <a:latin typeface="Arial" pitchFamily="34" charset="0"/>
-                <a:ea typeface="Arial" pitchFamily="34" charset="-122"/>
-                <a:cs typeface="Arial" pitchFamily="34" charset="-120"/>
+                <a:latin typeface="BIZ UDPGothic" pitchFamily="34" charset="0"/>
+                <a:ea typeface="BIZ UDPGothic" pitchFamily="34" charset="-122"/>
+                <a:cs typeface="BIZ UDPGothic" pitchFamily="34" charset="-120"/>
               </a:rPr>
               <a:t>▼</a:t>
             </a:r>
@@ -2988,9 +2988,9 @@
                 <a:solidFill>
                   <a:srgbClr val="2C5AA0"/>
                 </a:solidFill>
-                <a:latin typeface="Arial" pitchFamily="34" charset="0"/>
-                <a:ea typeface="Arial" pitchFamily="34" charset="-122"/>
-                <a:cs typeface="Arial" pitchFamily="34" charset="-120"/>
+                <a:latin typeface="BIZ UDPGothic" pitchFamily="34" charset="0"/>
+                <a:ea typeface="BIZ UDPGothic" pitchFamily="34" charset="-122"/>
+                <a:cs typeface="BIZ UDPGothic" pitchFamily="34" charset="-120"/>
               </a:rPr>
               <a:t>▼</a:t>
             </a:r>
@@ -3027,9 +3027,9 @@
                 <a:solidFill>
                   <a:srgbClr val="2C5AA0"/>
                 </a:solidFill>
-                <a:latin typeface="Arial" pitchFamily="34" charset="0"/>
-                <a:ea typeface="Arial" pitchFamily="34" charset="-122"/>
-                <a:cs typeface="Arial" pitchFamily="34" charset="-120"/>
+                <a:latin typeface="BIZ UDPGothic" pitchFamily="34" charset="0"/>
+                <a:ea typeface="BIZ UDPGothic" pitchFamily="34" charset="-122"/>
+                <a:cs typeface="BIZ UDPGothic" pitchFamily="34" charset="-120"/>
               </a:rPr>
               <a:t>▼</a:t>
             </a:r>
@@ -3106,9 +3106,9 @@
                 <a:solidFill>
                   <a:srgbClr val="FFFFFF"/>
                 </a:solidFill>
-                <a:latin typeface="Arial Black" pitchFamily="34" charset="0"/>
-                <a:ea typeface="Arial Black" pitchFamily="34" charset="-122"/>
-                <a:cs typeface="Arial Black" pitchFamily="34" charset="-120"/>
+                <a:latin typeface="BIZ UDPGothic" pitchFamily="34" charset="0"/>
+                <a:ea typeface="BIZ UDPGothic" pitchFamily="34" charset="-122"/>
+                <a:cs typeface="BIZ UDPGothic" pitchFamily="34" charset="-120"/>
               </a:rPr>
               <a:t>OCP相互作用</a:t>
             </a:r>
@@ -3145,9 +3145,9 @@
                 <a:solidFill>
                   <a:srgbClr val="2D3436"/>
                 </a:solidFill>
-                <a:latin typeface="Arial" pitchFamily="34" charset="0"/>
-                <a:ea typeface="Arial" pitchFamily="34" charset="-122"/>
-                <a:cs typeface="Arial" pitchFamily="34" charset="-120"/>
+                <a:latin typeface="BIZ UDPGothic" pitchFamily="34" charset="0"/>
+                <a:ea typeface="BIZ UDPGothic" pitchFamily="34" charset="-122"/>
+                <a:cs typeface="BIZ UDPGothic" pitchFamily="34" charset="-120"/>
               </a:rPr>
               <a:t>TPM ≥200mg/day</a:t>
             </a:r>
@@ -3162,9 +3162,9 @@
                 <a:solidFill>
                   <a:srgbClr val="2D3436"/>
                 </a:solidFill>
-                <a:latin typeface="Arial" pitchFamily="34" charset="0"/>
-                <a:ea typeface="Arial" pitchFamily="34" charset="-122"/>
-                <a:cs typeface="Arial" pitchFamily="34" charset="-120"/>
+                <a:latin typeface="BIZ UDPGothic" pitchFamily="34" charset="0"/>
+                <a:ea typeface="BIZ UDPGothic" pitchFamily="34" charset="-122"/>
+                <a:cs typeface="BIZ UDPGothic" pitchFamily="34" charset="-120"/>
               </a:rPr>
               <a:t>→ エチニルエストラジオール↓</a:t>
             </a:r>
@@ -3185,9 +3185,9 @@
                 <a:solidFill>
                   <a:srgbClr val="2D3436"/>
                 </a:solidFill>
-                <a:latin typeface="Arial" pitchFamily="34" charset="0"/>
-                <a:ea typeface="Arial" pitchFamily="34" charset="-122"/>
-                <a:cs typeface="Arial" pitchFamily="34" charset="-120"/>
+                <a:latin typeface="BIZ UDPGothic" pitchFamily="34" charset="0"/>
+                <a:ea typeface="BIZ UDPGothic" pitchFamily="34" charset="-122"/>
+                <a:cs typeface="BIZ UDPGothic" pitchFamily="34" charset="-120"/>
               </a:rPr>
               <a:t>PER ≥12mg/day</a:t>
             </a:r>
@@ -3202,9 +3202,9 @@
                 <a:solidFill>
                   <a:srgbClr val="2D3436"/>
                 </a:solidFill>
-                <a:latin typeface="Arial" pitchFamily="34" charset="0"/>
-                <a:ea typeface="Arial" pitchFamily="34" charset="-122"/>
-                <a:cs typeface="Arial" pitchFamily="34" charset="-120"/>
+                <a:latin typeface="BIZ UDPGothic" pitchFamily="34" charset="0"/>
+                <a:ea typeface="BIZ UDPGothic" pitchFamily="34" charset="-122"/>
+                <a:cs typeface="BIZ UDPGothic" pitchFamily="34" charset="-120"/>
               </a:rPr>
               <a:t>→ レボノルゲストレル代謝↑</a:t>
             </a:r>
@@ -3225,9 +3225,9 @@
                 <a:solidFill>
                   <a:srgbClr val="DC3545"/>
                 </a:solidFill>
-                <a:latin typeface="Arial" pitchFamily="34" charset="0"/>
-                <a:ea typeface="Arial" pitchFamily="34" charset="-122"/>
-                <a:cs typeface="Arial" pitchFamily="34" charset="-120"/>
+                <a:latin typeface="BIZ UDPGothic" pitchFamily="34" charset="0"/>
+                <a:ea typeface="BIZ UDPGothic" pitchFamily="34" charset="-122"/>
+                <a:cs typeface="BIZ UDPGothic" pitchFamily="34" charset="-120"/>
               </a:rPr>
               <a:t>→ 避妊法の確認必須</a:t>
             </a:r>
@@ -3264,9 +3264,9 @@
                 <a:solidFill>
                   <a:srgbClr val="636E72"/>
                 </a:solidFill>
-                <a:latin typeface="Arial" pitchFamily="34" charset="0"/>
-                <a:ea typeface="Arial" pitchFamily="34" charset="-122"/>
-                <a:cs typeface="Arial" pitchFamily="34" charset="-120"/>
+                <a:latin typeface="BIZ UDPGothic" pitchFamily="34" charset="0"/>
+                <a:ea typeface="BIZ UDPGothic" pitchFamily="34" charset="-122"/>
+                <a:cs typeface="BIZ UDPGothic" pitchFamily="34" charset="-120"/>
               </a:rPr>
               <a:t>10/15</a:t>
             </a:r>
@@ -3351,17 +3351,17 @@
               <a:buNone/>
             </a:pPr>
             <a:r>
-              <a:rPr lang="en-US" sz="2800" b="1" dirty="0">
+              <a:rPr lang="en-US" sz="2400" b="1" dirty="0">
                 <a:solidFill>
                   <a:srgbClr val="FFFFFF"/>
                 </a:solidFill>
-                <a:latin typeface="Arial Black" pitchFamily="34" charset="0"/>
-                <a:ea typeface="Arial Black" pitchFamily="34" charset="-122"/>
-                <a:cs typeface="Arial Black" pitchFamily="34" charset="-120"/>
+                <a:latin typeface="BIZ UDPGothic" pitchFamily="34" charset="0"/>
+                <a:ea typeface="BIZ UDPGothic" pitchFamily="34" charset="-122"/>
+                <a:cs typeface="BIZ UDPGothic" pitchFamily="34" charset="-120"/>
               </a:rPr>
               <a:t>JMEで避けるべき薬剤</a:t>
             </a:r>
-            <a:endParaRPr lang="en-US" sz="2800" dirty="0"/>
+            <a:endParaRPr lang="en-US" sz="2400" dirty="0"/>
           </a:p>
         </p:txBody>
       </p:sp>
@@ -3441,9 +3441,9 @@
                 <a:solidFill>
                   <a:srgbClr val="FFFFFF"/>
                 </a:solidFill>
-                <a:latin typeface="Arial Black" pitchFamily="34" charset="0"/>
-                <a:ea typeface="Arial Black" pitchFamily="34" charset="-122"/>
-                <a:cs typeface="Arial Black" pitchFamily="34" charset="-120"/>
+                <a:latin typeface="BIZ UDPGothic" pitchFamily="34" charset="0"/>
+                <a:ea typeface="BIZ UDPGothic" pitchFamily="34" charset="-122"/>
+                <a:cs typeface="BIZ UDPGothic" pitchFamily="34" charset="-120"/>
               </a:rPr>
               <a:t>⚠ ミオクロニー発作を増悪させるNaチャネルブロッカー</a:t>
             </a:r>
@@ -3500,9 +3500,9 @@
                 <a:solidFill>
                   <a:srgbClr val="DC3545"/>
                 </a:solidFill>
-                <a:latin typeface="Arial Black" pitchFamily="34" charset="0"/>
-                <a:ea typeface="Arial Black" pitchFamily="34" charset="-122"/>
-                <a:cs typeface="Arial Black" pitchFamily="34" charset="-120"/>
+                <a:latin typeface="BIZ UDPGothic" pitchFamily="34" charset="0"/>
+                <a:ea typeface="BIZ UDPGothic" pitchFamily="34" charset="-122"/>
+                <a:cs typeface="BIZ UDPGothic" pitchFamily="34" charset="-120"/>
               </a:rPr>
               <a:t>✕  カルバマゼピン（CBZ）</a:t>
             </a:r>
@@ -3579,9 +3579,9 @@
                 <a:solidFill>
                   <a:srgbClr val="DC3545"/>
                 </a:solidFill>
-                <a:latin typeface="Arial Black" pitchFamily="34" charset="0"/>
-                <a:ea typeface="Arial Black" pitchFamily="34" charset="-122"/>
-                <a:cs typeface="Arial Black" pitchFamily="34" charset="-120"/>
+                <a:latin typeface="BIZ UDPGothic" pitchFamily="34" charset="0"/>
+                <a:ea typeface="BIZ UDPGothic" pitchFamily="34" charset="-122"/>
+                <a:cs typeface="BIZ UDPGothic" pitchFamily="34" charset="-120"/>
               </a:rPr>
               <a:t>✕  フェニトイン（PHT）</a:t>
             </a:r>
@@ -3658,9 +3658,9 @@
                 <a:solidFill>
                   <a:srgbClr val="DC3545"/>
                 </a:solidFill>
-                <a:latin typeface="Arial Black" pitchFamily="34" charset="0"/>
-                <a:ea typeface="Arial Black" pitchFamily="34" charset="-122"/>
-                <a:cs typeface="Arial Black" pitchFamily="34" charset="-120"/>
+                <a:latin typeface="BIZ UDPGothic" pitchFamily="34" charset="0"/>
+                <a:ea typeface="BIZ UDPGothic" pitchFamily="34" charset="-122"/>
+                <a:cs typeface="BIZ UDPGothic" pitchFamily="34" charset="-120"/>
               </a:rPr>
               <a:t>✕  ガバペンチン（GBP）</a:t>
             </a:r>
@@ -3764,9 +3764,9 @@
                 <a:solidFill>
                   <a:srgbClr val="E8850C"/>
                 </a:solidFill>
-                <a:latin typeface="Arial Black" pitchFamily="34" charset="0"/>
-                <a:ea typeface="Arial Black" pitchFamily="34" charset="-122"/>
-                <a:cs typeface="Arial Black" pitchFamily="34" charset="-120"/>
+                <a:latin typeface="BIZ UDPGothic" pitchFamily="34" charset="0"/>
+                <a:ea typeface="BIZ UDPGothic" pitchFamily="34" charset="-122"/>
+                <a:cs typeface="BIZ UDPGothic" pitchFamily="34" charset="-120"/>
               </a:rPr>
               <a:t>よくあるピットフォール</a:t>
             </a:r>
@@ -3806,9 +3806,9 @@
                 <a:solidFill>
                   <a:srgbClr val="2D3436"/>
                 </a:solidFill>
-                <a:latin typeface="Arial" pitchFamily="34" charset="0"/>
-                <a:ea typeface="Arial" pitchFamily="34" charset="-122"/>
-                <a:cs typeface="Arial" pitchFamily="34" charset="-120"/>
+                <a:latin typeface="BIZ UDPGothic" pitchFamily="34" charset="0"/>
+                <a:ea typeface="BIZ UDPGothic" pitchFamily="34" charset="-122"/>
+                <a:cs typeface="BIZ UDPGothic" pitchFamily="34" charset="-120"/>
               </a:rPr>
               <a:t>GTCSだけを見て焦点性てんかんと誤診</a:t>
             </a:r>
@@ -3826,9 +3826,9 @@
                 <a:solidFill>
                   <a:srgbClr val="2D3436"/>
                 </a:solidFill>
-                <a:latin typeface="Arial" pitchFamily="34" charset="0"/>
-                <a:ea typeface="Arial" pitchFamily="34" charset="-122"/>
-                <a:cs typeface="Arial" pitchFamily="34" charset="-120"/>
+                <a:latin typeface="BIZ UDPGothic" pitchFamily="34" charset="0"/>
+                <a:ea typeface="BIZ UDPGothic" pitchFamily="34" charset="-122"/>
+                <a:cs typeface="BIZ UDPGothic" pitchFamily="34" charset="-120"/>
               </a:rPr>
               <a:t>　→ カルバマゼピンを処方</a:t>
             </a:r>
@@ -3846,9 +3846,9 @@
                 <a:solidFill>
                   <a:srgbClr val="DC3545"/>
                 </a:solidFill>
-                <a:latin typeface="Arial" pitchFamily="34" charset="0"/>
-                <a:ea typeface="Arial" pitchFamily="34" charset="-122"/>
-                <a:cs typeface="Arial" pitchFamily="34" charset="-120"/>
+                <a:latin typeface="BIZ UDPGothic" pitchFamily="34" charset="0"/>
+                <a:ea typeface="BIZ UDPGothic" pitchFamily="34" charset="-122"/>
+                <a:cs typeface="BIZ UDPGothic" pitchFamily="34" charset="-120"/>
               </a:rPr>
               <a:t>　→ ミオクロニー発作が増悪</a:t>
             </a:r>
@@ -3875,9 +3875,9 @@
                 <a:solidFill>
                   <a:srgbClr val="2C5AA0"/>
                 </a:solidFill>
-                <a:latin typeface="Arial" pitchFamily="34" charset="0"/>
-                <a:ea typeface="Arial" pitchFamily="34" charset="-122"/>
-                <a:cs typeface="Arial" pitchFamily="34" charset="-120"/>
+                <a:latin typeface="BIZ UDPGothic" pitchFamily="34" charset="0"/>
+                <a:ea typeface="BIZ UDPGothic" pitchFamily="34" charset="-122"/>
+                <a:cs typeface="BIZ UDPGothic" pitchFamily="34" charset="-120"/>
               </a:rPr>
               <a:t>朝のミオクロニー発作を問診で拾い上げることが誤治療を防ぐ第一歩</a:t>
             </a:r>
@@ -3914,9 +3914,9 @@
                 <a:solidFill>
                   <a:srgbClr val="636E72"/>
                 </a:solidFill>
-                <a:latin typeface="Arial" pitchFamily="34" charset="0"/>
-                <a:ea typeface="Arial" pitchFamily="34" charset="-122"/>
-                <a:cs typeface="Arial" pitchFamily="34" charset="-120"/>
+                <a:latin typeface="BIZ UDPGothic" pitchFamily="34" charset="0"/>
+                <a:ea typeface="BIZ UDPGothic" pitchFamily="34" charset="-122"/>
+                <a:cs typeface="BIZ UDPGothic" pitchFamily="34" charset="-120"/>
               </a:rPr>
               <a:t>11/15</a:t>
             </a:r>
@@ -4001,17 +4001,17 @@
               <a:buNone/>
             </a:pPr>
             <a:r>
-              <a:rPr lang="en-US" sz="2800" b="1" dirty="0">
+              <a:rPr lang="en-US" sz="2400" b="1" dirty="0">
                 <a:solidFill>
                   <a:srgbClr val="FFFFFF"/>
                 </a:solidFill>
-                <a:latin typeface="Arial Black" pitchFamily="34" charset="0"/>
-                <a:ea typeface="Arial Black" pitchFamily="34" charset="-122"/>
-                <a:cs typeface="Arial Black" pitchFamily="34" charset="-120"/>
+                <a:latin typeface="BIZ UDPGothic" pitchFamily="34" charset="0"/>
+                <a:ea typeface="BIZ UDPGothic" pitchFamily="34" charset="-122"/>
+                <a:cs typeface="BIZ UDPGothic" pitchFamily="34" charset="-120"/>
               </a:rPr>
               <a:t>薬剤抵抗性JME ― 新規治療の選択肢</a:t>
             </a:r>
-            <a:endParaRPr lang="en-US" sz="2800" dirty="0"/>
+            <a:endParaRPr lang="en-US" sz="2400" dirty="0"/>
           </a:p>
         </p:txBody>
       </p:sp>
@@ -4071,9 +4071,9 @@
                 <a:solidFill>
                   <a:srgbClr val="DC3545"/>
                 </a:solidFill>
-                <a:latin typeface="Arial Black" pitchFamily="34" charset="0"/>
-                <a:ea typeface="Arial Black" pitchFamily="34" charset="-122"/>
-                <a:cs typeface="Arial Black" pitchFamily="34" charset="-120"/>
+                <a:latin typeface="BIZ UDPGothic" pitchFamily="34" charset="0"/>
+                <a:ea typeface="BIZ UDPGothic" pitchFamily="34" charset="-122"/>
+                <a:cs typeface="BIZ UDPGothic" pitchFamily="34" charset="-120"/>
               </a:rPr>
               <a:t>リスク因子</a:t>
             </a:r>
@@ -4110,9 +4110,9 @@
                 <a:solidFill>
                   <a:srgbClr val="636E72"/>
                 </a:solidFill>
-                <a:latin typeface="Arial" pitchFamily="34" charset="0"/>
-                <a:ea typeface="Arial" pitchFamily="34" charset="-122"/>
-                <a:cs typeface="Arial" pitchFamily="34" charset="-120"/>
+                <a:latin typeface="BIZ UDPGothic" pitchFamily="34" charset="0"/>
+                <a:ea typeface="BIZ UDPGothic" pitchFamily="34" charset="-122"/>
+                <a:cs typeface="BIZ UDPGothic" pitchFamily="34" charset="-120"/>
               </a:rPr>
               <a:t>15〜33% が薬剤抵抗性</a:t>
             </a:r>
@@ -4149,9 +4149,9 @@
                 <a:solidFill>
                   <a:srgbClr val="2D3436"/>
                 </a:solidFill>
-                <a:latin typeface="Arial" pitchFamily="34" charset="0"/>
-                <a:ea typeface="Arial" pitchFamily="34" charset="-122"/>
-                <a:cs typeface="Arial" pitchFamily="34" charset="-120"/>
+                <a:latin typeface="BIZ UDPGothic" pitchFamily="34" charset="0"/>
+                <a:ea typeface="BIZ UDPGothic" pitchFamily="34" charset="-122"/>
+                <a:cs typeface="BIZ UDPGothic" pitchFamily="34" charset="-120"/>
               </a:rPr>
               <a:t>• 欠神発作の合併</a:t>
             </a:r>
@@ -4188,9 +4188,9 @@
                 <a:solidFill>
                   <a:srgbClr val="2D3436"/>
                 </a:solidFill>
-                <a:latin typeface="Arial" pitchFamily="34" charset="0"/>
-                <a:ea typeface="Arial" pitchFamily="34" charset="-122"/>
-                <a:cs typeface="Arial" pitchFamily="34" charset="-120"/>
+                <a:latin typeface="BIZ UDPGothic" pitchFamily="34" charset="0"/>
+                <a:ea typeface="BIZ UDPGothic" pitchFamily="34" charset="-122"/>
+                <a:cs typeface="BIZ UDPGothic" pitchFamily="34" charset="-120"/>
               </a:rPr>
               <a:t>• 若年発症</a:t>
             </a:r>
@@ -4227,9 +4227,9 @@
                 <a:solidFill>
                   <a:srgbClr val="2D3436"/>
                 </a:solidFill>
-                <a:latin typeface="Arial" pitchFamily="34" charset="0"/>
-                <a:ea typeface="Arial" pitchFamily="34" charset="-122"/>
-                <a:cs typeface="Arial" pitchFamily="34" charset="-120"/>
+                <a:latin typeface="BIZ UDPGothic" pitchFamily="34" charset="0"/>
+                <a:ea typeface="BIZ UDPGothic" pitchFamily="34" charset="-122"/>
+                <a:cs typeface="BIZ UDPGothic" pitchFamily="34" charset="-120"/>
               </a:rPr>
               <a:t>• 月経関連発作</a:t>
             </a:r>
@@ -4266,9 +4266,9 @@
                 <a:solidFill>
                   <a:srgbClr val="2D3436"/>
                 </a:solidFill>
-                <a:latin typeface="Arial" pitchFamily="34" charset="0"/>
-                <a:ea typeface="Arial" pitchFamily="34" charset="-122"/>
-                <a:cs typeface="Arial" pitchFamily="34" charset="-120"/>
+                <a:latin typeface="BIZ UDPGothic" pitchFamily="34" charset="0"/>
+                <a:ea typeface="BIZ UDPGothic" pitchFamily="34" charset="-122"/>
+                <a:cs typeface="BIZ UDPGothic" pitchFamily="34" charset="-120"/>
               </a:rPr>
               <a:t>• 熱性けいれん既往</a:t>
             </a:r>
@@ -4305,9 +4305,9 @@
                 <a:solidFill>
                   <a:srgbClr val="2D3436"/>
                 </a:solidFill>
-                <a:latin typeface="Arial" pitchFamily="34" charset="0"/>
-                <a:ea typeface="Arial" pitchFamily="34" charset="-122"/>
-                <a:cs typeface="Arial" pitchFamily="34" charset="-120"/>
+                <a:latin typeface="BIZ UDPGothic" pitchFamily="34" charset="0"/>
+                <a:ea typeface="BIZ UDPGothic" pitchFamily="34" charset="-122"/>
+                <a:cs typeface="BIZ UDPGothic" pitchFamily="34" charset="-120"/>
               </a:rPr>
               <a:t>• VPA抵抗性</a:t>
             </a:r>
@@ -4344,9 +4344,9 @@
                 <a:solidFill>
                   <a:srgbClr val="2D3436"/>
                 </a:solidFill>
-                <a:latin typeface="Arial" pitchFamily="34" charset="0"/>
-                <a:ea typeface="Arial" pitchFamily="34" charset="-122"/>
-                <a:cs typeface="Arial" pitchFamily="34" charset="-120"/>
+                <a:latin typeface="BIZ UDPGothic" pitchFamily="34" charset="0"/>
+                <a:ea typeface="BIZ UDPGothic" pitchFamily="34" charset="-122"/>
+                <a:cs typeface="BIZ UDPGothic" pitchFamily="34" charset="-120"/>
               </a:rPr>
               <a:t>• 脳波上のGPFA</a:t>
             </a:r>
@@ -4430,9 +4430,9 @@
                 <a:solidFill>
                   <a:srgbClr val="FFFFFF"/>
                 </a:solidFill>
-                <a:latin typeface="Arial Black" pitchFamily="34" charset="0"/>
-                <a:ea typeface="Arial Black" pitchFamily="34" charset="-122"/>
-                <a:cs typeface="Arial Black" pitchFamily="34" charset="-120"/>
+                <a:latin typeface="BIZ UDPGothic" pitchFamily="34" charset="0"/>
+                <a:ea typeface="BIZ UDPGothic" pitchFamily="34" charset="-122"/>
+                <a:cs typeface="BIZ UDPGothic" pitchFamily="34" charset="-120"/>
               </a:rPr>
               <a:t>セノバメート</a:t>
             </a:r>
@@ -4472,9 +4472,9 @@
                 <a:solidFill>
                   <a:srgbClr val="2D3436"/>
                 </a:solidFill>
-                <a:latin typeface="Arial" pitchFamily="34" charset="0"/>
-                <a:ea typeface="Arial" pitchFamily="34" charset="-122"/>
-                <a:cs typeface="Arial" pitchFamily="34" charset="-120"/>
+                <a:latin typeface="BIZ UDPGothic" pitchFamily="34" charset="0"/>
+                <a:ea typeface="BIZ UDPGothic" pitchFamily="34" charset="-122"/>
+                <a:cs typeface="BIZ UDPGothic" pitchFamily="34" charset="-120"/>
               </a:rPr>
               <a:t>3M: 75%が≥50%発作減少</a:t>
             </a:r>
@@ -4492,9 +4492,9 @@
                 <a:solidFill>
                   <a:srgbClr val="2D3436"/>
                 </a:solidFill>
-                <a:latin typeface="Arial" pitchFamily="34" charset="0"/>
-                <a:ea typeface="Arial" pitchFamily="34" charset="-122"/>
-                <a:cs typeface="Arial" pitchFamily="34" charset="-120"/>
+                <a:latin typeface="BIZ UDPGothic" pitchFamily="34" charset="0"/>
+                <a:ea typeface="BIZ UDPGothic" pitchFamily="34" charset="-122"/>
+                <a:cs typeface="BIZ UDPGothic" pitchFamily="34" charset="-120"/>
               </a:rPr>
               <a:t>最終: 38%が発作消失</a:t>
             </a:r>
@@ -4512,9 +4512,9 @@
                 <a:solidFill>
                   <a:srgbClr val="2D3436"/>
                 </a:solidFill>
-                <a:latin typeface="Arial" pitchFamily="34" charset="0"/>
-                <a:ea typeface="Arial" pitchFamily="34" charset="-122"/>
-                <a:cs typeface="Arial" pitchFamily="34" charset="-120"/>
+                <a:latin typeface="BIZ UDPGothic" pitchFamily="34" charset="0"/>
+                <a:ea typeface="BIZ UDPGothic" pitchFamily="34" charset="-122"/>
+                <a:cs typeface="BIZ UDPGothic" pitchFamily="34" charset="-120"/>
               </a:rPr>
               <a:t>ER受診も有意に減少</a:t>
             </a:r>
@@ -4532,9 +4532,9 @@
                 <a:solidFill>
                   <a:srgbClr val="636E72"/>
                 </a:solidFill>
-                <a:latin typeface="Arial" pitchFamily="34" charset="0"/>
-                <a:ea typeface="Arial" pitchFamily="34" charset="-122"/>
-                <a:cs typeface="Arial" pitchFamily="34" charset="-120"/>
+                <a:latin typeface="BIZ UDPGothic" pitchFamily="34" charset="0"/>
+                <a:ea typeface="BIZ UDPGothic" pitchFamily="34" charset="-122"/>
+                <a:cs typeface="BIZ UDPGothic" pitchFamily="34" charset="-120"/>
               </a:rPr>
               <a:t>(Cleveland Clinic, 16例)</a:t>
             </a:r>
@@ -4618,9 +4618,9 @@
                 <a:solidFill>
                   <a:srgbClr val="FFFFFF"/>
                 </a:solidFill>
-                <a:latin typeface="Arial Black" pitchFamily="34" charset="0"/>
-                <a:ea typeface="Arial Black" pitchFamily="34" charset="-122"/>
-                <a:cs typeface="Arial Black" pitchFamily="34" charset="-120"/>
+                <a:latin typeface="BIZ UDPGothic" pitchFamily="34" charset="0"/>
+                <a:ea typeface="BIZ UDPGothic" pitchFamily="34" charset="-122"/>
+                <a:cs typeface="BIZ UDPGothic" pitchFamily="34" charset="-120"/>
               </a:rPr>
               <a:t>ブリバラセタム</a:t>
             </a:r>
@@ -4660,9 +4660,9 @@
                 <a:solidFill>
                   <a:srgbClr val="2D3436"/>
                 </a:solidFill>
-                <a:latin typeface="Arial" pitchFamily="34" charset="0"/>
-                <a:ea typeface="Arial" pitchFamily="34" charset="-122"/>
-                <a:cs typeface="Arial" pitchFamily="34" charset="-120"/>
+                <a:latin typeface="BIZ UDPGothic" pitchFamily="34" charset="0"/>
+                <a:ea typeface="BIZ UDPGothic" pitchFamily="34" charset="-122"/>
+                <a:cs typeface="BIZ UDPGothic" pitchFamily="34" charset="-120"/>
               </a:rPr>
               <a:t>JME: responder rate 60%</a:t>
             </a:r>
@@ -4680,9 +4680,9 @@
                 <a:solidFill>
                   <a:srgbClr val="2D3436"/>
                 </a:solidFill>
-                <a:latin typeface="Arial" pitchFamily="34" charset="0"/>
-                <a:ea typeface="Arial" pitchFamily="34" charset="-122"/>
-                <a:cs typeface="Arial" pitchFamily="34" charset="-120"/>
+                <a:latin typeface="BIZ UDPGothic" pitchFamily="34" charset="0"/>
+                <a:ea typeface="BIZ UDPGothic" pitchFamily="34" charset="-122"/>
+                <a:cs typeface="BIZ UDPGothic" pitchFamily="34" charset="-120"/>
               </a:rPr>
               <a:t>LEVから15:1比率で切替可</a:t>
             </a:r>
@@ -4700,9 +4700,9 @@
                 <a:solidFill>
                   <a:srgbClr val="2D3436"/>
                 </a:solidFill>
-                <a:latin typeface="Arial" pitchFamily="34" charset="0"/>
-                <a:ea typeface="Arial" pitchFamily="34" charset="-122"/>
-                <a:cs typeface="Arial" pitchFamily="34" charset="-120"/>
+                <a:latin typeface="BIZ UDPGothic" pitchFamily="34" charset="0"/>
+                <a:ea typeface="BIZ UDPGothic" pitchFamily="34" charset="-122"/>
+                <a:cs typeface="BIZ UDPGothic" pitchFamily="34" charset="-120"/>
               </a:rPr>
               <a:t>精神行動副作用がLEVより少ない</a:t>
             </a:r>
@@ -4720,9 +4720,9 @@
                 <a:solidFill>
                   <a:srgbClr val="636E72"/>
                 </a:solidFill>
-                <a:latin typeface="Arial" pitchFamily="34" charset="0"/>
-                <a:ea typeface="Arial" pitchFamily="34" charset="-122"/>
-                <a:cs typeface="Arial" pitchFamily="34" charset="-120"/>
+                <a:latin typeface="BIZ UDPGothic" pitchFamily="34" charset="0"/>
+                <a:ea typeface="BIZ UDPGothic" pitchFamily="34" charset="-122"/>
+                <a:cs typeface="BIZ UDPGothic" pitchFamily="34" charset="-120"/>
               </a:rPr>
               <a:t>(多施設後方視研究, 61例)</a:t>
             </a:r>
@@ -4759,9 +4759,9 @@
                 <a:solidFill>
                   <a:srgbClr val="636E72"/>
                 </a:solidFill>
-                <a:latin typeface="Arial" pitchFamily="34" charset="0"/>
-                <a:ea typeface="Arial" pitchFamily="34" charset="-122"/>
-                <a:cs typeface="Arial" pitchFamily="34" charset="-120"/>
+                <a:latin typeface="BIZ UDPGothic" pitchFamily="34" charset="0"/>
+                <a:ea typeface="BIZ UDPGothic" pitchFamily="34" charset="-122"/>
+                <a:cs typeface="BIZ UDPGothic" pitchFamily="34" charset="-120"/>
               </a:rPr>
               <a:t>12/15</a:t>
             </a:r>
@@ -4846,17 +4846,17 @@
               <a:buNone/>
             </a:pPr>
             <a:r>
-              <a:rPr lang="en-US" sz="2800" b="1" dirty="0">
+              <a:rPr lang="en-US" sz="2400" b="1" dirty="0">
                 <a:solidFill>
                   <a:srgbClr val="FFFFFF"/>
                 </a:solidFill>
-                <a:latin typeface="Arial Black" pitchFamily="34" charset="0"/>
-                <a:ea typeface="Arial Black" pitchFamily="34" charset="-122"/>
-                <a:cs typeface="Arial Black" pitchFamily="34" charset="-120"/>
+                <a:latin typeface="BIZ UDPGothic" pitchFamily="34" charset="0"/>
+                <a:ea typeface="BIZ UDPGothic" pitchFamily="34" charset="-122"/>
+                <a:cs typeface="BIZ UDPGothic" pitchFamily="34" charset="-120"/>
               </a:rPr>
               <a:t>長期予後 ― 断薬リスクと経過パターン</a:t>
             </a:r>
-            <a:endParaRPr lang="en-US" sz="2800" dirty="0"/>
+            <a:endParaRPr lang="en-US" sz="2400" dirty="0"/>
           </a:p>
         </p:txBody>
       </p:sp>
@@ -4936,9 +4936,9 @@
                 <a:solidFill>
                   <a:srgbClr val="2D3436"/>
                 </a:solidFill>
-                <a:latin typeface="Arial Black" pitchFamily="34" charset="0"/>
-                <a:ea typeface="Arial Black" pitchFamily="34" charset="-122"/>
-                <a:cs typeface="Arial Black" pitchFamily="34" charset="-120"/>
+                <a:latin typeface="BIZ UDPGothic" pitchFamily="34" charset="0"/>
+                <a:ea typeface="BIZ UDPGothic" pitchFamily="34" charset="-122"/>
+                <a:cs typeface="BIZ UDPGothic" pitchFamily="34" charset="-120"/>
               </a:rPr>
               <a:t>断薬後の再発率: </a:t>
             </a:r>
@@ -4950,9 +4950,9 @@
                 <a:solidFill>
                   <a:srgbClr val="DC3545"/>
                 </a:solidFill>
-                <a:latin typeface="Arial Black" pitchFamily="34" charset="0"/>
-                <a:ea typeface="Arial Black" pitchFamily="34" charset="-122"/>
-                <a:cs typeface="Arial Black" pitchFamily="34" charset="-120"/>
+                <a:latin typeface="Segoe UI" pitchFamily="34" charset="0"/>
+                <a:ea typeface="Segoe UI" pitchFamily="34" charset="-122"/>
+                <a:cs typeface="Segoe UI" pitchFamily="34" charset="-120"/>
               </a:rPr>
               <a:t>75〜100%</a:t>
             </a:r>
@@ -4964,9 +4964,9 @@
                 <a:solidFill>
                   <a:srgbClr val="2D3436"/>
                 </a:solidFill>
-                <a:latin typeface="Arial Black" pitchFamily="34" charset="0"/>
-                <a:ea typeface="Arial Black" pitchFamily="34" charset="-122"/>
-                <a:cs typeface="Arial Black" pitchFamily="34" charset="-120"/>
+                <a:latin typeface="BIZ UDPGothic" pitchFamily="34" charset="0"/>
+                <a:ea typeface="BIZ UDPGothic" pitchFamily="34" charset="-122"/>
+                <a:cs typeface="BIZ UDPGothic" pitchFamily="34" charset="-120"/>
               </a:rPr>
               <a:t> (5年以内)</a:t>
             </a:r>
@@ -5003,9 +5003,9 @@
                 <a:solidFill>
                   <a:srgbClr val="2C5AA0"/>
                 </a:solidFill>
-                <a:latin typeface="Arial" pitchFamily="34" charset="0"/>
-                <a:ea typeface="Arial" pitchFamily="34" charset="-122"/>
-                <a:cs typeface="Arial" pitchFamily="34" charset="-120"/>
+                <a:latin typeface="BIZ UDPGothic" pitchFamily="34" charset="0"/>
+                <a:ea typeface="BIZ UDPGothic" pitchFamily="34" charset="-122"/>
+                <a:cs typeface="BIZ UDPGothic" pitchFamily="34" charset="-120"/>
               </a:rPr>
               <a:t>→ 多くの患者で生涯にわたる服薬継続が推奨</a:t>
             </a:r>
@@ -5069,9 +5069,9 @@
                 <a:solidFill>
                   <a:srgbClr val="2C5AA0"/>
                 </a:solidFill>
-                <a:latin typeface="Arial Black" pitchFamily="34" charset="0"/>
-                <a:ea typeface="Arial Black" pitchFamily="34" charset="-122"/>
-                <a:cs typeface="Arial Black" pitchFamily="34" charset="-120"/>
+                <a:latin typeface="BIZ UDPGothic" pitchFamily="34" charset="0"/>
+                <a:ea typeface="BIZ UDPGothic" pitchFamily="34" charset="-122"/>
+                <a:cs typeface="BIZ UDPGothic" pitchFamily="34" charset="-120"/>
               </a:rPr>
               <a:t>経過パターン (GGE, n=199)</a:t>
             </a:r>
@@ -5128,9 +5128,9 @@
                 <a:solidFill>
                   <a:srgbClr val="2D3436"/>
                 </a:solidFill>
-                <a:latin typeface="Arial" pitchFamily="34" charset="0"/>
-                <a:ea typeface="Arial" pitchFamily="34" charset="-122"/>
-                <a:cs typeface="Arial" pitchFamily="34" charset="-120"/>
+                <a:latin typeface="BIZ UDPGothic" pitchFamily="34" charset="0"/>
+                <a:ea typeface="BIZ UDPGothic" pitchFamily="34" charset="-122"/>
+                <a:cs typeface="BIZ UDPGothic" pitchFamily="34" charset="-120"/>
               </a:rPr>
               <a:t>寛解-再発型</a:t>
             </a:r>
@@ -5167,9 +5167,9 @@
                 <a:solidFill>
                   <a:srgbClr val="4A90D9"/>
                 </a:solidFill>
-                <a:latin typeface="Arial Black" pitchFamily="34" charset="0"/>
-                <a:ea typeface="Arial Black" pitchFamily="34" charset="-122"/>
-                <a:cs typeface="Arial Black" pitchFamily="34" charset="-120"/>
+                <a:latin typeface="Segoe UI" pitchFamily="34" charset="0"/>
+                <a:ea typeface="Segoe UI" pitchFamily="34" charset="-122"/>
+                <a:cs typeface="Segoe UI" pitchFamily="34" charset="-120"/>
               </a:rPr>
               <a:t>40.2%</a:t>
             </a:r>
@@ -5226,9 +5226,9 @@
                 <a:solidFill>
                   <a:srgbClr val="2D3436"/>
                 </a:solidFill>
-                <a:latin typeface="Arial" pitchFamily="34" charset="0"/>
-                <a:ea typeface="Arial" pitchFamily="34" charset="-122"/>
-                <a:cs typeface="Arial" pitchFamily="34" charset="-120"/>
+                <a:latin typeface="BIZ UDPGothic" pitchFamily="34" charset="0"/>
+                <a:ea typeface="BIZ UDPGothic" pitchFamily="34" charset="-122"/>
+                <a:cs typeface="BIZ UDPGothic" pitchFamily="34" charset="-120"/>
               </a:rPr>
               <a:t>3年寛解達成</a:t>
             </a:r>
@@ -5265,9 +5265,9 @@
                 <a:solidFill>
                   <a:srgbClr val="28A745"/>
                 </a:solidFill>
-                <a:latin typeface="Arial Black" pitchFamily="34" charset="0"/>
-                <a:ea typeface="Arial Black" pitchFamily="34" charset="-122"/>
-                <a:cs typeface="Arial Black" pitchFamily="34" charset="-120"/>
+                <a:latin typeface="Segoe UI" pitchFamily="34" charset="0"/>
+                <a:ea typeface="Segoe UI" pitchFamily="34" charset="-122"/>
+                <a:cs typeface="Segoe UI" pitchFamily="34" charset="-120"/>
               </a:rPr>
               <a:t>81.9%</a:t>
             </a:r>
@@ -5324,9 +5324,9 @@
                 <a:solidFill>
                   <a:srgbClr val="2D3436"/>
                 </a:solidFill>
-                <a:latin typeface="Arial" pitchFamily="34" charset="0"/>
-                <a:ea typeface="Arial" pitchFamily="34" charset="-122"/>
-                <a:cs typeface="Arial" pitchFamily="34" charset="-120"/>
+                <a:latin typeface="BIZ UDPGothic" pitchFamily="34" charset="0"/>
+                <a:ea typeface="BIZ UDPGothic" pitchFamily="34" charset="-122"/>
+                <a:cs typeface="BIZ UDPGothic" pitchFamily="34" charset="-120"/>
               </a:rPr>
               <a:t>10年寛解達成</a:t>
             </a:r>
@@ -5363,9 +5363,9 @@
                 <a:solidFill>
                   <a:srgbClr val="E8850C"/>
                 </a:solidFill>
-                <a:latin typeface="Arial Black" pitchFamily="34" charset="0"/>
-                <a:ea typeface="Arial Black" pitchFamily="34" charset="-122"/>
-                <a:cs typeface="Arial Black" pitchFamily="34" charset="-120"/>
+                <a:latin typeface="Segoe UI" pitchFamily="34" charset="0"/>
+                <a:ea typeface="Segoe UI" pitchFamily="34" charset="-122"/>
+                <a:cs typeface="Segoe UI" pitchFamily="34" charset="-120"/>
               </a:rPr>
               <a:t>46.2%</a:t>
             </a:r>
@@ -5422,9 +5422,9 @@
                 <a:solidFill>
                   <a:srgbClr val="2D3436"/>
                 </a:solidFill>
-                <a:latin typeface="Arial" pitchFamily="34" charset="0"/>
-                <a:ea typeface="Arial" pitchFamily="34" charset="-122"/>
-                <a:cs typeface="Arial" pitchFamily="34" charset="-120"/>
+                <a:latin typeface="BIZ UDPGothic" pitchFamily="34" charset="0"/>
+                <a:ea typeface="BIZ UDPGothic" pitchFamily="34" charset="-122"/>
+                <a:cs typeface="BIZ UDPGothic" pitchFamily="34" charset="-120"/>
               </a:rPr>
               <a:t>持続的抵抗性</a:t>
             </a:r>
@@ -5461,9 +5461,9 @@
                 <a:solidFill>
                   <a:srgbClr val="DC3545"/>
                 </a:solidFill>
-                <a:latin typeface="Arial Black" pitchFamily="34" charset="0"/>
-                <a:ea typeface="Arial Black" pitchFamily="34" charset="-122"/>
-                <a:cs typeface="Arial Black" pitchFamily="34" charset="-120"/>
+                <a:latin typeface="Segoe UI" pitchFamily="34" charset="0"/>
+                <a:ea typeface="Segoe UI" pitchFamily="34" charset="-122"/>
+                <a:cs typeface="Segoe UI" pitchFamily="34" charset="-120"/>
               </a:rPr>
               <a:t>14.6%</a:t>
             </a:r>
@@ -5547,9 +5547,9 @@
                 <a:solidFill>
                   <a:srgbClr val="FFFFFF"/>
                 </a:solidFill>
-                <a:latin typeface="Arial Black" pitchFamily="34" charset="0"/>
-                <a:ea typeface="Arial Black" pitchFamily="34" charset="-122"/>
-                <a:cs typeface="Arial Black" pitchFamily="34" charset="-120"/>
+                <a:latin typeface="BIZ UDPGothic" pitchFamily="34" charset="0"/>
+                <a:ea typeface="BIZ UDPGothic" pitchFamily="34" charset="-122"/>
+                <a:cs typeface="BIZ UDPGothic" pitchFamily="34" charset="-120"/>
               </a:rPr>
               <a:t>従来の教条 vs 最新の知見</a:t>
             </a:r>
@@ -5589,9 +5589,9 @@
                 <a:solidFill>
                   <a:srgbClr val="2D3436"/>
                 </a:solidFill>
-                <a:latin typeface="Arial" pitchFamily="34" charset="0"/>
-                <a:ea typeface="Arial" pitchFamily="34" charset="-122"/>
-                <a:cs typeface="Arial" pitchFamily="34" charset="-120"/>
+                <a:latin typeface="BIZ UDPGothic" pitchFamily="34" charset="0"/>
+                <a:ea typeface="BIZ UDPGothic" pitchFamily="34" charset="-122"/>
+                <a:cs typeface="BIZ UDPGothic" pitchFamily="34" charset="-120"/>
               </a:rPr>
               <a:t>従来: </a:t>
             </a:r>
@@ -5606,9 +5606,9 @@
                 <a:solidFill>
                   <a:srgbClr val="2D3436"/>
                 </a:solidFill>
-                <a:latin typeface="Arial" pitchFamily="34" charset="0"/>
-                <a:ea typeface="Arial" pitchFamily="34" charset="-122"/>
-                <a:cs typeface="Arial" pitchFamily="34" charset="-120"/>
+                <a:latin typeface="BIZ UDPGothic" pitchFamily="34" charset="0"/>
+                <a:ea typeface="BIZ UDPGothic" pitchFamily="34" charset="-122"/>
+                <a:cs typeface="BIZ UDPGothic" pitchFamily="34" charset="-120"/>
               </a:rPr>
               <a:t>「JME = 全例生涯服薬」</a:t>
             </a:r>
@@ -5635,9 +5635,9 @@
                 <a:solidFill>
                   <a:srgbClr val="2D3436"/>
                 </a:solidFill>
-                <a:latin typeface="Arial" pitchFamily="34" charset="0"/>
-                <a:ea typeface="Arial" pitchFamily="34" charset="-122"/>
-                <a:cs typeface="Arial" pitchFamily="34" charset="-120"/>
+                <a:latin typeface="BIZ UDPGothic" pitchFamily="34" charset="0"/>
+                <a:ea typeface="BIZ UDPGothic" pitchFamily="34" charset="-122"/>
+                <a:cs typeface="BIZ UDPGothic" pitchFamily="34" charset="-120"/>
               </a:rPr>
               <a:t>最新 (Nat Rev Neurol 2021):</a:t>
             </a:r>
@@ -5655,9 +5655,9 @@
                 <a:solidFill>
                   <a:srgbClr val="2D3436"/>
                 </a:solidFill>
-                <a:latin typeface="Arial" pitchFamily="34" charset="0"/>
-                <a:ea typeface="Arial" pitchFamily="34" charset="-122"/>
-                <a:cs typeface="Arial" pitchFamily="34" charset="-120"/>
+                <a:latin typeface="BIZ UDPGothic" pitchFamily="34" charset="0"/>
+                <a:ea typeface="BIZ UDPGothic" pitchFamily="34" charset="-122"/>
+                <a:cs typeface="BIZ UDPGothic" pitchFamily="34" charset="-120"/>
               </a:rPr>
               <a:t>「加齢とともに一部の患者で</a:t>
             </a:r>
@@ -5675,9 +5675,9 @@
                 <a:solidFill>
                   <a:srgbClr val="2D3436"/>
                 </a:solidFill>
-                <a:latin typeface="Arial" pitchFamily="34" charset="0"/>
-                <a:ea typeface="Arial" pitchFamily="34" charset="-122"/>
-                <a:cs typeface="Arial" pitchFamily="34" charset="-120"/>
+                <a:latin typeface="BIZ UDPGothic" pitchFamily="34" charset="0"/>
+                <a:ea typeface="BIZ UDPGothic" pitchFamily="34" charset="-122"/>
+                <a:cs typeface="BIZ UDPGothic" pitchFamily="34" charset="-120"/>
               </a:rPr>
               <a:t>薬剤中止が可能」</a:t>
             </a:r>
@@ -5704,9 +5704,9 @@
                 <a:solidFill>
                   <a:srgbClr val="2C5AA0"/>
                 </a:solidFill>
-                <a:latin typeface="Arial" pitchFamily="34" charset="0"/>
-                <a:ea typeface="Arial" pitchFamily="34" charset="-122"/>
-                <a:cs typeface="Arial" pitchFamily="34" charset="-120"/>
+                <a:latin typeface="BIZ UDPGothic" pitchFamily="34" charset="0"/>
+                <a:ea typeface="BIZ UDPGothic" pitchFamily="34" charset="-122"/>
+                <a:cs typeface="BIZ UDPGothic" pitchFamily="34" charset="-120"/>
               </a:rPr>
               <a:t>→ 個々のリスク評価に基づく</a:t>
             </a:r>
@@ -5724,9 +5724,9 @@
                 <a:solidFill>
                   <a:srgbClr val="2C5AA0"/>
                 </a:solidFill>
-                <a:latin typeface="Arial" pitchFamily="34" charset="0"/>
-                <a:ea typeface="Arial" pitchFamily="34" charset="-122"/>
-                <a:cs typeface="Arial" pitchFamily="34" charset="-120"/>
+                <a:latin typeface="BIZ UDPGothic" pitchFamily="34" charset="0"/>
+                <a:ea typeface="BIZ UDPGothic" pitchFamily="34" charset="-122"/>
+                <a:cs typeface="BIZ UDPGothic" pitchFamily="34" charset="-120"/>
               </a:rPr>
               <a:t>   判断が求められる</a:t>
             </a:r>
@@ -5763,9 +5763,9 @@
                 <a:solidFill>
                   <a:srgbClr val="636E72"/>
                 </a:solidFill>
-                <a:latin typeface="Arial" pitchFamily="34" charset="0"/>
-                <a:ea typeface="Arial" pitchFamily="34" charset="-122"/>
-                <a:cs typeface="Arial" pitchFamily="34" charset="-120"/>
+                <a:latin typeface="BIZ UDPGothic" pitchFamily="34" charset="0"/>
+                <a:ea typeface="BIZ UDPGothic" pitchFamily="34" charset="-122"/>
+                <a:cs typeface="BIZ UDPGothic" pitchFamily="34" charset="-120"/>
               </a:rPr>
               <a:t>13/15</a:t>
             </a:r>
@@ -5850,17 +5850,17 @@
               <a:buNone/>
             </a:pPr>
             <a:r>
-              <a:rPr lang="en-US" sz="2800" b="1" dirty="0">
+              <a:rPr lang="en-US" sz="2400" b="1" dirty="0">
                 <a:solidFill>
                   <a:srgbClr val="FFFFFF"/>
                 </a:solidFill>
-                <a:latin typeface="Arial Black" pitchFamily="34" charset="0"/>
-                <a:ea typeface="Arial Black" pitchFamily="34" charset="-122"/>
-                <a:cs typeface="Arial Black" pitchFamily="34" charset="-120"/>
+                <a:latin typeface="BIZ UDPGothic" pitchFamily="34" charset="0"/>
+                <a:ea typeface="BIZ UDPGothic" pitchFamily="34" charset="-122"/>
+                <a:cs typeface="BIZ UDPGothic" pitchFamily="34" charset="-120"/>
               </a:rPr>
               <a:t>併存症と QOL ― 発作だけの問題ではない</a:t>
             </a:r>
-            <a:endParaRPr lang="en-US" sz="2800" dirty="0"/>
+            <a:endParaRPr lang="en-US" sz="2400" dirty="0"/>
           </a:p>
         </p:txBody>
       </p:sp>
@@ -5940,9 +5940,9 @@
                 <a:solidFill>
                   <a:srgbClr val="FFFFFF"/>
                 </a:solidFill>
-                <a:latin typeface="Arial Black" pitchFamily="34" charset="0"/>
-                <a:ea typeface="Arial Black" pitchFamily="34" charset="-122"/>
-                <a:cs typeface="Arial Black" pitchFamily="34" charset="-120"/>
+                <a:latin typeface="BIZ UDPGothic" pitchFamily="34" charset="0"/>
+                <a:ea typeface="BIZ UDPGothic" pitchFamily="34" charset="-122"/>
+                <a:cs typeface="BIZ UDPGothic" pitchFamily="34" charset="-120"/>
               </a:rPr>
               <a:t>精神医学的併存症</a:t>
             </a:r>
@@ -5982,9 +5982,9 @@
                 <a:solidFill>
                   <a:srgbClr val="2D3436"/>
                 </a:solidFill>
-                <a:latin typeface="Arial" pitchFamily="34" charset="0"/>
-                <a:ea typeface="Arial" pitchFamily="34" charset="-122"/>
-                <a:cs typeface="Arial" pitchFamily="34" charset="-120"/>
+                <a:latin typeface="BIZ UDPGothic" pitchFamily="34" charset="0"/>
+                <a:ea typeface="BIZ UDPGothic" pitchFamily="34" charset="-122"/>
+                <a:cs typeface="BIZ UDPGothic" pitchFamily="34" charset="-120"/>
               </a:rPr>
               <a:t>不安障害: 10%</a:t>
             </a:r>
@@ -6002,9 +6002,9 @@
                 <a:solidFill>
                   <a:srgbClr val="2D3436"/>
                 </a:solidFill>
-                <a:latin typeface="Arial" pitchFamily="34" charset="0"/>
-                <a:ea typeface="Arial" pitchFamily="34" charset="-122"/>
-                <a:cs typeface="Arial" pitchFamily="34" charset="-120"/>
+                <a:latin typeface="BIZ UDPGothic" pitchFamily="34" charset="0"/>
+                <a:ea typeface="BIZ UDPGothic" pitchFamily="34" charset="-122"/>
+                <a:cs typeface="BIZ UDPGothic" pitchFamily="34" charset="-120"/>
               </a:rPr>
               <a:t>うつ病: 6%</a:t>
             </a:r>
@@ -6031,9 +6031,9 @@
                 <a:solidFill>
                   <a:srgbClr val="2D3436"/>
                 </a:solidFill>
-                <a:latin typeface="Arial" pitchFamily="34" charset="0"/>
-                <a:ea typeface="Arial" pitchFamily="34" charset="-122"/>
-                <a:cs typeface="Arial" pitchFamily="34" charset="-120"/>
+                <a:latin typeface="BIZ UDPGothic" pitchFamily="34" charset="0"/>
+                <a:ea typeface="BIZ UDPGothic" pitchFamily="34" charset="-122"/>
+                <a:cs typeface="BIZ UDPGothic" pitchFamily="34" charset="-120"/>
               </a:rPr>
               <a:t>GTCS頻度と精神的</a:t>
             </a:r>
@@ -6051,9 +6051,9 @@
                 <a:solidFill>
                   <a:srgbClr val="2C5AA0"/>
                 </a:solidFill>
-                <a:latin typeface="Arial" pitchFamily="34" charset="0"/>
-                <a:ea typeface="Arial" pitchFamily="34" charset="-122"/>
-                <a:cs typeface="Arial" pitchFamily="34" charset="-120"/>
+                <a:latin typeface="BIZ UDPGothic" pitchFamily="34" charset="0"/>
+                <a:ea typeface="BIZ UDPGothic" pitchFamily="34" charset="-122"/>
+                <a:cs typeface="BIZ UDPGothic" pitchFamily="34" charset="-120"/>
               </a:rPr>
               <a:t>併存症に有意な関連</a:t>
             </a:r>
@@ -6137,9 +6137,9 @@
                 <a:solidFill>
                   <a:srgbClr val="FFFFFF"/>
                 </a:solidFill>
-                <a:latin typeface="Arial Black" pitchFamily="34" charset="0"/>
-                <a:ea typeface="Arial Black" pitchFamily="34" charset="-122"/>
-                <a:cs typeface="Arial Black" pitchFamily="34" charset="-120"/>
+                <a:latin typeface="BIZ UDPGothic" pitchFamily="34" charset="0"/>
+                <a:ea typeface="BIZ UDPGothic" pitchFamily="34" charset="-122"/>
+                <a:cs typeface="BIZ UDPGothic" pitchFamily="34" charset="-120"/>
               </a:rPr>
               <a:t>前頭葉機能障害</a:t>
             </a:r>
@@ -6179,9 +6179,9 @@
                 <a:solidFill>
                   <a:srgbClr val="2D3436"/>
                 </a:solidFill>
-                <a:latin typeface="Arial" pitchFamily="34" charset="0"/>
-                <a:ea typeface="Arial" pitchFamily="34" charset="-122"/>
-                <a:cs typeface="Arial" pitchFamily="34" charset="-120"/>
+                <a:latin typeface="BIZ UDPGothic" pitchFamily="34" charset="0"/>
+                <a:ea typeface="BIZ UDPGothic" pitchFamily="34" charset="-122"/>
+                <a:cs typeface="BIZ UDPGothic" pitchFamily="34" charset="-120"/>
               </a:rPr>
               <a:t>遂行機能障害</a:t>
             </a:r>
@@ -6199,9 +6199,9 @@
                 <a:solidFill>
                   <a:srgbClr val="2D3436"/>
                 </a:solidFill>
-                <a:latin typeface="Arial" pitchFamily="34" charset="0"/>
-                <a:ea typeface="Arial" pitchFamily="34" charset="-122"/>
-                <a:cs typeface="Arial" pitchFamily="34" charset="-120"/>
+                <a:latin typeface="BIZ UDPGothic" pitchFamily="34" charset="0"/>
+                <a:ea typeface="BIZ UDPGothic" pitchFamily="34" charset="-122"/>
+                <a:cs typeface="BIZ UDPGothic" pitchFamily="34" charset="-120"/>
               </a:rPr>
               <a:t>発作コントロールの</a:t>
             </a:r>
@@ -6219,9 +6219,9 @@
                 <a:solidFill>
                   <a:srgbClr val="2D3436"/>
                 </a:solidFill>
-                <a:latin typeface="Arial" pitchFamily="34" charset="0"/>
-                <a:ea typeface="Arial" pitchFamily="34" charset="-122"/>
-                <a:cs typeface="Arial" pitchFamily="34" charset="-120"/>
+                <a:latin typeface="BIZ UDPGothic" pitchFamily="34" charset="0"/>
+                <a:ea typeface="BIZ UDPGothic" pitchFamily="34" charset="-122"/>
+                <a:cs typeface="BIZ UDPGothic" pitchFamily="34" charset="-120"/>
               </a:rPr>
               <a:t>良否にかかわらず出現</a:t>
             </a:r>
@@ -6248,9 +6248,9 @@
                 <a:solidFill>
                   <a:srgbClr val="2D3436"/>
                 </a:solidFill>
-                <a:latin typeface="Arial" pitchFamily="34" charset="0"/>
-                <a:ea typeface="Arial" pitchFamily="34" charset="-122"/>
-                <a:cs typeface="Arial" pitchFamily="34" charset="-120"/>
+                <a:latin typeface="BIZ UDPGothic" pitchFamily="34" charset="0"/>
+                <a:ea typeface="BIZ UDPGothic" pitchFamily="34" charset="-122"/>
+                <a:cs typeface="BIZ UDPGothic" pitchFamily="34" charset="-120"/>
               </a:rPr>
               <a:t>前頭-視床-皮質</a:t>
             </a:r>
@@ -6268,9 +6268,9 @@
                 <a:solidFill>
                   <a:srgbClr val="E8850C"/>
                 </a:solidFill>
-                <a:latin typeface="Arial" pitchFamily="34" charset="0"/>
-                <a:ea typeface="Arial" pitchFamily="34" charset="-122"/>
-                <a:cs typeface="Arial" pitchFamily="34" charset="-120"/>
+                <a:latin typeface="BIZ UDPGothic" pitchFamily="34" charset="0"/>
+                <a:ea typeface="BIZ UDPGothic" pitchFamily="34" charset="-122"/>
+                <a:cs typeface="BIZ UDPGothic" pitchFamily="34" charset="-120"/>
               </a:rPr>
               <a:t>ネットワーク異常</a:t>
             </a:r>
@@ -6354,9 +6354,9 @@
                 <a:solidFill>
                   <a:srgbClr val="FFFFFF"/>
                 </a:solidFill>
-                <a:latin typeface="Arial Black" pitchFamily="34" charset="0"/>
-                <a:ea typeface="Arial Black" pitchFamily="34" charset="-122"/>
-                <a:cs typeface="Arial Black" pitchFamily="34" charset="-120"/>
+                <a:latin typeface="BIZ UDPGothic" pitchFamily="34" charset="0"/>
+                <a:ea typeface="BIZ UDPGothic" pitchFamily="34" charset="-122"/>
+                <a:cs typeface="BIZ UDPGothic" pitchFamily="34" charset="-120"/>
               </a:rPr>
               <a:t>睡眠障害</a:t>
             </a:r>
@@ -6396,9 +6396,9 @@
                 <a:solidFill>
                   <a:srgbClr val="2D3436"/>
                 </a:solidFill>
-                <a:latin typeface="Arial" pitchFamily="34" charset="0"/>
-                <a:ea typeface="Arial" pitchFamily="34" charset="-122"/>
-                <a:cs typeface="Arial" pitchFamily="34" charset="-120"/>
+                <a:latin typeface="BIZ UDPGothic" pitchFamily="34" charset="0"/>
+                <a:ea typeface="BIZ UDPGothic" pitchFamily="34" charset="-122"/>
+                <a:cs typeface="BIZ UDPGothic" pitchFamily="34" charset="-120"/>
               </a:rPr>
               <a:t>入眠潜時延長</a:t>
             </a:r>
@@ -6416,9 +6416,9 @@
                 <a:solidFill>
                   <a:srgbClr val="2D3436"/>
                 </a:solidFill>
-                <a:latin typeface="Arial" pitchFamily="34" charset="0"/>
-                <a:ea typeface="Arial" pitchFamily="34" charset="-122"/>
-                <a:cs typeface="Arial" pitchFamily="34" charset="-120"/>
+                <a:latin typeface="BIZ UDPGothic" pitchFamily="34" charset="0"/>
+                <a:ea typeface="BIZ UDPGothic" pitchFamily="34" charset="-122"/>
+                <a:cs typeface="BIZ UDPGothic" pitchFamily="34" charset="-120"/>
               </a:rPr>
               <a:t>睡眠効率低下</a:t>
             </a:r>
@@ -6436,9 +6436,9 @@
                 <a:solidFill>
                   <a:srgbClr val="2D3436"/>
                 </a:solidFill>
-                <a:latin typeface="Arial" pitchFamily="34" charset="0"/>
-                <a:ea typeface="Arial" pitchFamily="34" charset="-122"/>
-                <a:cs typeface="Arial" pitchFamily="34" charset="-120"/>
+                <a:latin typeface="BIZ UDPGothic" pitchFamily="34" charset="0"/>
+                <a:ea typeface="BIZ UDPGothic" pitchFamily="34" charset="-122"/>
+                <a:cs typeface="BIZ UDPGothic" pitchFamily="34" charset="-120"/>
               </a:rPr>
               <a:t>REM睡眠減少</a:t>
             </a:r>
@@ -6465,9 +6465,9 @@
                 <a:solidFill>
                   <a:srgbClr val="2D3436"/>
                 </a:solidFill>
-                <a:latin typeface="Arial" pitchFamily="34" charset="0"/>
-                <a:ea typeface="Arial" pitchFamily="34" charset="-122"/>
-                <a:cs typeface="Arial" pitchFamily="34" charset="-120"/>
+                <a:latin typeface="BIZ UDPGothic" pitchFamily="34" charset="0"/>
+                <a:ea typeface="BIZ UDPGothic" pitchFamily="34" charset="-122"/>
+                <a:cs typeface="BIZ UDPGothic" pitchFamily="34" charset="-120"/>
               </a:rPr>
               <a:t>VPA使用者:</a:t>
             </a:r>
@@ -6485,9 +6485,9 @@
                 <a:solidFill>
                   <a:srgbClr val="DC3545"/>
                 </a:solidFill>
-                <a:latin typeface="Arial" pitchFamily="34" charset="0"/>
-                <a:ea typeface="Arial" pitchFamily="34" charset="-122"/>
-                <a:cs typeface="Arial" pitchFamily="34" charset="-120"/>
+                <a:latin typeface="BIZ UDPGothic" pitchFamily="34" charset="0"/>
+                <a:ea typeface="BIZ UDPGothic" pitchFamily="34" charset="-122"/>
+                <a:cs typeface="BIZ UDPGothic" pitchFamily="34" charset="-120"/>
               </a:rPr>
               <a:t>いびき・OSA増加</a:t>
             </a:r>
@@ -6574,9 +6574,9 @@
                 <a:solidFill>
                   <a:srgbClr val="2C5AA0"/>
                 </a:solidFill>
-                <a:latin typeface="Arial" pitchFamily="34" charset="0"/>
-                <a:ea typeface="Arial" pitchFamily="34" charset="-122"/>
-                <a:cs typeface="Arial" pitchFamily="34" charset="-120"/>
+                <a:latin typeface="BIZ UDPGothic" pitchFamily="34" charset="0"/>
+                <a:ea typeface="BIZ UDPGothic" pitchFamily="34" charset="-122"/>
+                <a:cs typeface="BIZ UDPGothic" pitchFamily="34" charset="-120"/>
               </a:rPr>
               <a:t>QOLへの影響: </a:t>
             </a:r>
@@ -6591,9 +6591,9 @@
                 <a:solidFill>
                   <a:srgbClr val="2D3436"/>
                 </a:solidFill>
-                <a:latin typeface="Arial" pitchFamily="34" charset="0"/>
-                <a:ea typeface="Arial" pitchFamily="34" charset="-122"/>
-                <a:cs typeface="Arial" pitchFamily="34" charset="-120"/>
+                <a:latin typeface="BIZ UDPGothic" pitchFamily="34" charset="0"/>
+                <a:ea typeface="BIZ UDPGothic" pitchFamily="34" charset="-122"/>
+                <a:cs typeface="BIZ UDPGothic" pitchFamily="34" charset="-120"/>
               </a:rPr>
               <a:t>発作コントロール下でも「発作への心配」「認知機能」ドメインが特に低下</a:t>
             </a:r>
@@ -6611,9 +6611,9 @@
                 <a:solidFill>
                   <a:srgbClr val="28A745"/>
                 </a:solidFill>
-                <a:latin typeface="Arial" pitchFamily="34" charset="0"/>
-                <a:ea typeface="Arial" pitchFamily="34" charset="-122"/>
-                <a:cs typeface="Arial" pitchFamily="34" charset="-120"/>
+                <a:latin typeface="BIZ UDPGothic" pitchFamily="34" charset="0"/>
+                <a:ea typeface="BIZ UDPGothic" pitchFamily="34" charset="-122"/>
+                <a:cs typeface="BIZ UDPGothic" pitchFamily="34" charset="-120"/>
               </a:rPr>
               <a:t>→ 発作管理 ＋ 精神面・睡眠面を含めた包括的ケアが長期QOL改善の鍵</a:t>
             </a:r>
@@ -6650,9 +6650,9 @@
                 <a:solidFill>
                   <a:srgbClr val="636E72"/>
                 </a:solidFill>
-                <a:latin typeface="Arial" pitchFamily="34" charset="0"/>
-                <a:ea typeface="Arial" pitchFamily="34" charset="-122"/>
-                <a:cs typeface="Arial" pitchFamily="34" charset="-120"/>
+                <a:latin typeface="BIZ UDPGothic" pitchFamily="34" charset="0"/>
+                <a:ea typeface="BIZ UDPGothic" pitchFamily="34" charset="-122"/>
+                <a:cs typeface="BIZ UDPGothic" pitchFamily="34" charset="-120"/>
               </a:rPr>
               <a:t>14/15</a:t>
             </a:r>
@@ -6757,17 +6757,17 @@
               <a:buNone/>
             </a:pPr>
             <a:r>
-              <a:rPr lang="en-US" sz="3000" b="1" dirty="0">
+              <a:rPr lang="en-US" sz="2800" b="1" dirty="0">
                 <a:solidFill>
                   <a:srgbClr val="4A90D9"/>
                 </a:solidFill>
-                <a:latin typeface="Arial Black" pitchFamily="34" charset="0"/>
-                <a:ea typeface="Arial Black" pitchFamily="34" charset="-122"/>
-                <a:cs typeface="Arial Black" pitchFamily="34" charset="-120"/>
+                <a:latin typeface="Segoe UI" pitchFamily="34" charset="0"/>
+                <a:ea typeface="Segoe UI" pitchFamily="34" charset="-122"/>
+                <a:cs typeface="Segoe UI" pitchFamily="34" charset="-120"/>
               </a:rPr>
               <a:t>Take-home Message</a:t>
             </a:r>
-            <a:endParaRPr lang="en-US" sz="3000" dirty="0"/>
+            <a:endParaRPr lang="en-US" sz="2800" dirty="0"/>
           </a:p>
         </p:txBody>
       </p:sp>
@@ -6820,9 +6820,9 @@
                 <a:solidFill>
                   <a:srgbClr val="FFFFFF"/>
                 </a:solidFill>
-                <a:latin typeface="Arial Black" pitchFamily="34" charset="0"/>
-                <a:ea typeface="Arial Black" pitchFamily="34" charset="-122"/>
-                <a:cs typeface="Arial Black" pitchFamily="34" charset="-120"/>
+                <a:latin typeface="BIZ UDPGothic" pitchFamily="34" charset="0"/>
+                <a:ea typeface="BIZ UDPGothic" pitchFamily="34" charset="-122"/>
+                <a:cs typeface="BIZ UDPGothic" pitchFamily="34" charset="-120"/>
               </a:rPr>
               <a:t>1</a:t>
             </a:r>
@@ -6855,17 +6855,17 @@
               <a:buNone/>
             </a:pPr>
             <a:r>
-              <a:rPr lang="en-US" sz="1700" dirty="0">
+              <a:rPr lang="en-US" sz="1600" dirty="0">
                 <a:solidFill>
                   <a:srgbClr val="FFFFFF"/>
                 </a:solidFill>
-                <a:latin typeface="Arial" pitchFamily="34" charset="0"/>
-                <a:ea typeface="Arial" pitchFamily="34" charset="-122"/>
-                <a:cs typeface="Arial" pitchFamily="34" charset="-120"/>
+                <a:latin typeface="BIZ UDPGothic" pitchFamily="34" charset="0"/>
+                <a:ea typeface="BIZ UDPGothic" pitchFamily="34" charset="-122"/>
+                <a:cs typeface="BIZ UDPGothic" pitchFamily="34" charset="-120"/>
               </a:rPr>
               <a:t>GTCSの若年者 → 必ず朝のミオクロニーを問診</a:t>
             </a:r>
-            <a:endParaRPr lang="en-US" sz="1700" dirty="0"/>
+            <a:endParaRPr lang="en-US" sz="1600" dirty="0"/>
           </a:p>
         </p:txBody>
       </p:sp>
@@ -6918,9 +6918,9 @@
                 <a:solidFill>
                   <a:srgbClr val="FFFFFF"/>
                 </a:solidFill>
-                <a:latin typeface="Arial Black" pitchFamily="34" charset="0"/>
-                <a:ea typeface="Arial Black" pitchFamily="34" charset="-122"/>
-                <a:cs typeface="Arial Black" pitchFamily="34" charset="-120"/>
+                <a:latin typeface="BIZ UDPGothic" pitchFamily="34" charset="0"/>
+                <a:ea typeface="BIZ UDPGothic" pitchFamily="34" charset="-122"/>
+                <a:cs typeface="BIZ UDPGothic" pitchFamily="34" charset="-120"/>
               </a:rPr>
               <a:t>2</a:t>
             </a:r>
@@ -6953,17 +6953,17 @@
               <a:buNone/>
             </a:pPr>
             <a:r>
-              <a:rPr lang="en-US" sz="1700" dirty="0">
+              <a:rPr lang="en-US" sz="1600" dirty="0">
                 <a:solidFill>
                   <a:srgbClr val="FFFFFF"/>
                 </a:solidFill>
-                <a:latin typeface="Arial" pitchFamily="34" charset="0"/>
-                <a:ea typeface="Arial" pitchFamily="34" charset="-122"/>
-                <a:cs typeface="Arial" pitchFamily="34" charset="-120"/>
+                <a:latin typeface="BIZ UDPGothic" pitchFamily="34" charset="0"/>
+                <a:ea typeface="BIZ UDPGothic" pitchFamily="34" charset="-122"/>
+                <a:cs typeface="BIZ UDPGothic" pitchFamily="34" charset="-120"/>
               </a:rPr>
               <a:t>脳波 = 4〜6Hz多棘徐波。睡眠剥奪で感度向上</a:t>
             </a:r>
-            <a:endParaRPr lang="en-US" sz="1700" dirty="0"/>
+            <a:endParaRPr lang="en-US" sz="1600" dirty="0"/>
           </a:p>
         </p:txBody>
       </p:sp>
@@ -7016,9 +7016,9 @@
                 <a:solidFill>
                   <a:srgbClr val="FFFFFF"/>
                 </a:solidFill>
-                <a:latin typeface="Arial Black" pitchFamily="34" charset="0"/>
-                <a:ea typeface="Arial Black" pitchFamily="34" charset="-122"/>
-                <a:cs typeface="Arial Black" pitchFamily="34" charset="-120"/>
+                <a:latin typeface="BIZ UDPGothic" pitchFamily="34" charset="0"/>
+                <a:ea typeface="BIZ UDPGothic" pitchFamily="34" charset="-122"/>
+                <a:cs typeface="BIZ UDPGothic" pitchFamily="34" charset="-120"/>
               </a:rPr>
               <a:t>3</a:t>
             </a:r>
@@ -7051,17 +7051,17 @@
               <a:buNone/>
             </a:pPr>
             <a:r>
-              <a:rPr lang="en-US" sz="1700" dirty="0">
+              <a:rPr lang="en-US" sz="1600" dirty="0">
                 <a:solidFill>
                   <a:srgbClr val="FFFFFF"/>
                 </a:solidFill>
-                <a:latin typeface="Arial" pitchFamily="34" charset="0"/>
-                <a:ea typeface="Arial" pitchFamily="34" charset="-122"/>
-                <a:cs typeface="Arial" pitchFamily="34" charset="-120"/>
+                <a:latin typeface="BIZ UDPGothic" pitchFamily="34" charset="0"/>
+                <a:ea typeface="BIZ UDPGothic" pitchFamily="34" charset="-122"/>
+                <a:cs typeface="BIZ UDPGothic" pitchFamily="34" charset="-120"/>
               </a:rPr>
               <a:t>VPA ≒ LEV の有効性。妊娠可能女性 → LEV第一選択</a:t>
             </a:r>
-            <a:endParaRPr lang="en-US" sz="1700" dirty="0"/>
+            <a:endParaRPr lang="en-US" sz="1600" dirty="0"/>
           </a:p>
         </p:txBody>
       </p:sp>
@@ -7114,9 +7114,9 @@
                 <a:solidFill>
                   <a:srgbClr val="FFFFFF"/>
                 </a:solidFill>
-                <a:latin typeface="Arial Black" pitchFamily="34" charset="0"/>
-                <a:ea typeface="Arial Black" pitchFamily="34" charset="-122"/>
-                <a:cs typeface="Arial Black" pitchFamily="34" charset="-120"/>
+                <a:latin typeface="BIZ UDPGothic" pitchFamily="34" charset="0"/>
+                <a:ea typeface="BIZ UDPGothic" pitchFamily="34" charset="-122"/>
+                <a:cs typeface="BIZ UDPGothic" pitchFamily="34" charset="-120"/>
               </a:rPr>
               <a:t>4</a:t>
             </a:r>
@@ -7149,17 +7149,17 @@
               <a:buNone/>
             </a:pPr>
             <a:r>
-              <a:rPr lang="en-US" sz="1700" dirty="0">
+              <a:rPr lang="en-US" sz="1600" dirty="0">
                 <a:solidFill>
                   <a:srgbClr val="FFFFFF"/>
                 </a:solidFill>
-                <a:latin typeface="Arial" pitchFamily="34" charset="0"/>
-                <a:ea typeface="Arial" pitchFamily="34" charset="-122"/>
-                <a:cs typeface="Arial" pitchFamily="34" charset="-120"/>
+                <a:latin typeface="BIZ UDPGothic" pitchFamily="34" charset="0"/>
+                <a:ea typeface="BIZ UDPGothic" pitchFamily="34" charset="-122"/>
+                <a:cs typeface="BIZ UDPGothic" pitchFamily="34" charset="-120"/>
               </a:rPr>
               <a:t>CBZ・PHT・GBP はミオクロニー増悪 → 禁忌</a:t>
             </a:r>
-            <a:endParaRPr lang="en-US" sz="1700" dirty="0"/>
+            <a:endParaRPr lang="en-US" sz="1600" dirty="0"/>
           </a:p>
         </p:txBody>
       </p:sp>
@@ -7212,9 +7212,9 @@
                 <a:solidFill>
                   <a:srgbClr val="FFFFFF"/>
                 </a:solidFill>
-                <a:latin typeface="Arial Black" pitchFamily="34" charset="0"/>
-                <a:ea typeface="Arial Black" pitchFamily="34" charset="-122"/>
-                <a:cs typeface="Arial Black" pitchFamily="34" charset="-120"/>
+                <a:latin typeface="BIZ UDPGothic" pitchFamily="34" charset="0"/>
+                <a:ea typeface="BIZ UDPGothic" pitchFamily="34" charset="-122"/>
+                <a:cs typeface="BIZ UDPGothic" pitchFamily="34" charset="-120"/>
               </a:rPr>
               <a:t>5</a:t>
             </a:r>
@@ -7247,17 +7247,17 @@
               <a:buNone/>
             </a:pPr>
             <a:r>
-              <a:rPr lang="en-US" sz="1700" dirty="0">
+              <a:rPr lang="en-US" sz="1600" dirty="0">
                 <a:solidFill>
                   <a:srgbClr val="FFFFFF"/>
                 </a:solidFill>
-                <a:latin typeface="Arial" pitchFamily="34" charset="0"/>
-                <a:ea typeface="Arial" pitchFamily="34" charset="-122"/>
-                <a:cs typeface="Arial" pitchFamily="34" charset="-120"/>
+                <a:latin typeface="BIZ UDPGothic" pitchFamily="34" charset="0"/>
+                <a:ea typeface="BIZ UDPGothic" pitchFamily="34" charset="-122"/>
+                <a:cs typeface="BIZ UDPGothic" pitchFamily="34" charset="-120"/>
               </a:rPr>
               <a:t>薬剤抵抗性(15-33%) → セノバメート・BRV</a:t>
             </a:r>
-            <a:endParaRPr lang="en-US" sz="1700" dirty="0"/>
+            <a:endParaRPr lang="en-US" sz="1600" dirty="0"/>
           </a:p>
         </p:txBody>
       </p:sp>
@@ -7310,9 +7310,9 @@
                 <a:solidFill>
                   <a:srgbClr val="FFFFFF"/>
                 </a:solidFill>
-                <a:latin typeface="Arial Black" pitchFamily="34" charset="0"/>
-                <a:ea typeface="Arial Black" pitchFamily="34" charset="-122"/>
-                <a:cs typeface="Arial Black" pitchFamily="34" charset="-120"/>
+                <a:latin typeface="BIZ UDPGothic" pitchFamily="34" charset="0"/>
+                <a:ea typeface="BIZ UDPGothic" pitchFamily="34" charset="-122"/>
+                <a:cs typeface="BIZ UDPGothic" pitchFamily="34" charset="-120"/>
               </a:rPr>
               <a:t>6</a:t>
             </a:r>
@@ -7345,17 +7345,17 @@
               <a:buNone/>
             </a:pPr>
             <a:r>
-              <a:rPr lang="en-US" sz="1700" dirty="0">
+              <a:rPr lang="en-US" sz="1600" dirty="0">
                 <a:solidFill>
                   <a:srgbClr val="FFFFFF"/>
                 </a:solidFill>
-                <a:latin typeface="Arial" pitchFamily="34" charset="0"/>
-                <a:ea typeface="Arial" pitchFamily="34" charset="-122"/>
-                <a:cs typeface="Arial" pitchFamily="34" charset="-120"/>
+                <a:latin typeface="BIZ UDPGothic" pitchFamily="34" charset="0"/>
+                <a:ea typeface="BIZ UDPGothic" pitchFamily="34" charset="-122"/>
+                <a:cs typeface="BIZ UDPGothic" pitchFamily="34" charset="-120"/>
               </a:rPr>
               <a:t>多くは生涯服薬。一部は加齢で中止可能</a:t>
             </a:r>
-            <a:endParaRPr lang="en-US" sz="1700" dirty="0"/>
+            <a:endParaRPr lang="en-US" sz="1600" dirty="0"/>
           </a:p>
         </p:txBody>
       </p:sp>
@@ -7408,9 +7408,9 @@
                 <a:solidFill>
                   <a:srgbClr val="FFFFFF"/>
                 </a:solidFill>
-                <a:latin typeface="Arial Black" pitchFamily="34" charset="0"/>
-                <a:ea typeface="Arial Black" pitchFamily="34" charset="-122"/>
-                <a:cs typeface="Arial Black" pitchFamily="34" charset="-120"/>
+                <a:latin typeface="BIZ UDPGothic" pitchFamily="34" charset="0"/>
+                <a:ea typeface="BIZ UDPGothic" pitchFamily="34" charset="-122"/>
+                <a:cs typeface="BIZ UDPGothic" pitchFamily="34" charset="-120"/>
               </a:rPr>
               <a:t>7</a:t>
             </a:r>
@@ -7443,17 +7443,17 @@
               <a:buNone/>
             </a:pPr>
             <a:r>
-              <a:rPr lang="en-US" sz="1700" dirty="0">
+              <a:rPr lang="en-US" sz="1600" dirty="0">
                 <a:solidFill>
                   <a:srgbClr val="FFFFFF"/>
                 </a:solidFill>
-                <a:latin typeface="Arial" pitchFamily="34" charset="0"/>
-                <a:ea typeface="Arial" pitchFamily="34" charset="-122"/>
-                <a:cs typeface="Arial" pitchFamily="34" charset="-120"/>
+                <a:latin typeface="BIZ UDPGothic" pitchFamily="34" charset="0"/>
+                <a:ea typeface="BIZ UDPGothic" pitchFamily="34" charset="-122"/>
+                <a:cs typeface="BIZ UDPGothic" pitchFamily="34" charset="-120"/>
               </a:rPr>
               <a:t>精神併存症 + 睡眠障害 → 包括的ケアが鍵</a:t>
             </a:r>
-            <a:endParaRPr lang="en-US" sz="1700" dirty="0"/>
+            <a:endParaRPr lang="en-US" sz="1600" dirty="0"/>
           </a:p>
         </p:txBody>
       </p:sp>
@@ -7486,9 +7486,9 @@
                 <a:solidFill>
                   <a:srgbClr val="636E72"/>
                 </a:solidFill>
-                <a:latin typeface="Arial" pitchFamily="34" charset="0"/>
-                <a:ea typeface="Arial" pitchFamily="34" charset="-122"/>
-                <a:cs typeface="Arial" pitchFamily="34" charset="-120"/>
+                <a:latin typeface="BIZ UDPGothic" pitchFamily="34" charset="0"/>
+                <a:ea typeface="BIZ UDPGothic" pitchFamily="34" charset="-122"/>
+                <a:cs typeface="BIZ UDPGothic" pitchFamily="34" charset="-120"/>
               </a:rPr>
               <a:t>ご視聴ありがとうございました</a:t>
             </a:r>
@@ -7573,17 +7573,17 @@
               <a:buNone/>
             </a:pPr>
             <a:r>
-              <a:rPr lang="en-US" sz="2800" b="1" dirty="0">
+              <a:rPr lang="en-US" sz="2400" b="1" dirty="0">
                 <a:solidFill>
                   <a:srgbClr val="FFFFFF"/>
                 </a:solidFill>
-                <a:latin typeface="Arial Black" pitchFamily="34" charset="0"/>
-                <a:ea typeface="Arial Black" pitchFamily="34" charset="-122"/>
-                <a:cs typeface="Arial Black" pitchFamily="34" charset="-120"/>
+                <a:latin typeface="BIZ UDPGothic" pitchFamily="34" charset="0"/>
+                <a:ea typeface="BIZ UDPGothic" pitchFamily="34" charset="-122"/>
+                <a:cs typeface="BIZ UDPGothic" pitchFamily="34" charset="-120"/>
               </a:rPr>
               <a:t>参考文献</a:t>
             </a:r>
-            <a:endParaRPr lang="en-US" sz="2800" dirty="0"/>
+            <a:endParaRPr lang="en-US" sz="2400" dirty="0"/>
           </a:p>
         </p:txBody>
       </p:sp>
@@ -7616,9 +7616,9 @@
                 <a:solidFill>
                   <a:srgbClr val="2D3436"/>
                 </a:solidFill>
-                <a:latin typeface="Arial" pitchFamily="34" charset="0"/>
-                <a:ea typeface="Arial" pitchFamily="34" charset="-122"/>
-                <a:cs typeface="Arial" pitchFamily="34" charset="-120"/>
+                <a:latin typeface="Segoe UI" pitchFamily="34" charset="0"/>
+                <a:ea typeface="Segoe UI" pitchFamily="34" charset="-122"/>
+                <a:cs typeface="Segoe UI" pitchFamily="34" charset="-120"/>
               </a:rPr>
               <a:t>1. Gesche J, et al. Eur J Neurol. 2020;27(4):676-684</a:t>
             </a:r>
@@ -7655,9 +7655,9 @@
                 <a:solidFill>
                   <a:srgbClr val="2D3436"/>
                 </a:solidFill>
-                <a:latin typeface="Arial" pitchFamily="34" charset="0"/>
-                <a:ea typeface="Arial" pitchFamily="34" charset="-122"/>
-                <a:cs typeface="Arial" pitchFamily="34" charset="-120"/>
+                <a:latin typeface="Segoe UI" pitchFamily="34" charset="0"/>
+                <a:ea typeface="Segoe UI" pitchFamily="34" charset="-122"/>
+                <a:cs typeface="Segoe UI" pitchFamily="34" charset="-120"/>
               </a:rPr>
               <a:t>2. Vorderwülbecke BJ, et al. Nat Rev Neurol. 2021;18(2):71-83</a:t>
             </a:r>
@@ -7694,9 +7694,9 @@
                 <a:solidFill>
                   <a:srgbClr val="2D3436"/>
                 </a:solidFill>
-                <a:latin typeface="Arial" pitchFamily="34" charset="0"/>
-                <a:ea typeface="Arial" pitchFamily="34" charset="-122"/>
-                <a:cs typeface="Arial" pitchFamily="34" charset="-120"/>
+                <a:latin typeface="Segoe UI" pitchFamily="34" charset="0"/>
+                <a:ea typeface="Segoe UI" pitchFamily="34" charset="-122"/>
+                <a:cs typeface="Segoe UI" pitchFamily="34" charset="-120"/>
               </a:rPr>
               <a:t>3. Cerulli Irelli E, et al. Epilepsia. 2020;61(11):2452-2460</a:t>
             </a:r>
@@ -7733,9 +7733,9 @@
                 <a:solidFill>
                   <a:srgbClr val="2D3436"/>
                 </a:solidFill>
-                <a:latin typeface="Arial" pitchFamily="34" charset="0"/>
-                <a:ea typeface="Arial" pitchFamily="34" charset="-122"/>
-                <a:cs typeface="Arial" pitchFamily="34" charset="-120"/>
+                <a:latin typeface="Segoe UI" pitchFamily="34" charset="0"/>
+                <a:ea typeface="Segoe UI" pitchFamily="34" charset="-122"/>
+                <a:cs typeface="Segoe UI" pitchFamily="34" charset="-120"/>
               </a:rPr>
               <a:t>4. Mastrangelo M, et al. Am J Med Genet B. 2025;198(7):76-87</a:t>
             </a:r>
@@ -7772,9 +7772,9 @@
                 <a:solidFill>
                   <a:srgbClr val="2D3436"/>
                 </a:solidFill>
-                <a:latin typeface="Arial" pitchFamily="34" charset="0"/>
-                <a:ea typeface="Arial" pitchFamily="34" charset="-122"/>
-                <a:cs typeface="Arial" pitchFamily="34" charset="-120"/>
+                <a:latin typeface="Segoe UI" pitchFamily="34" charset="0"/>
+                <a:ea typeface="Segoe UI" pitchFamily="34" charset="-122"/>
+                <a:cs typeface="Segoe UI" pitchFamily="34" charset="-120"/>
               </a:rPr>
               <a:t>5. Nica A. Rev Neurol (Paris). 2024;180(4):271-289</a:t>
             </a:r>
@@ -7811,9 +7811,9 @@
                 <a:solidFill>
                   <a:srgbClr val="2D3436"/>
                 </a:solidFill>
-                <a:latin typeface="Arial" pitchFamily="34" charset="0"/>
-                <a:ea typeface="Arial" pitchFamily="34" charset="-122"/>
-                <a:cs typeface="Arial" pitchFamily="34" charset="-120"/>
+                <a:latin typeface="Segoe UI" pitchFamily="34" charset="0"/>
+                <a:ea typeface="Segoe UI" pitchFamily="34" charset="-122"/>
+                <a:cs typeface="Segoe UI" pitchFamily="34" charset="-120"/>
               </a:rPr>
               <a:t>6. Yetkin O, et al. Seizure. 2024;120:61-71</a:t>
             </a:r>
@@ -7850,9 +7850,9 @@
                 <a:solidFill>
                   <a:srgbClr val="2D3436"/>
                 </a:solidFill>
-                <a:latin typeface="Arial" pitchFamily="34" charset="0"/>
-                <a:ea typeface="Arial" pitchFamily="34" charset="-122"/>
-                <a:cs typeface="Arial" pitchFamily="34" charset="-120"/>
+                <a:latin typeface="Segoe UI" pitchFamily="34" charset="0"/>
+                <a:ea typeface="Segoe UI" pitchFamily="34" charset="-122"/>
+                <a:cs typeface="Segoe UI" pitchFamily="34" charset="-120"/>
               </a:rPr>
               <a:t>7. Lu Y, et al. Epilepsia. 2025;66(11):4107-4121</a:t>
             </a:r>
@@ -7889,9 +7889,9 @@
                 <a:solidFill>
                   <a:srgbClr val="2D3436"/>
                 </a:solidFill>
-                <a:latin typeface="Arial" pitchFamily="34" charset="0"/>
-                <a:ea typeface="Arial" pitchFamily="34" charset="-122"/>
-                <a:cs typeface="Arial" pitchFamily="34" charset="-120"/>
+                <a:latin typeface="Segoe UI" pitchFamily="34" charset="0"/>
+                <a:ea typeface="Segoe UI" pitchFamily="34" charset="-122"/>
+                <a:cs typeface="Segoe UI" pitchFamily="34" charset="-120"/>
               </a:rPr>
               <a:t>8. Pereira ARO, et al. Epilepsy Behav. 2025;171:110512</a:t>
             </a:r>
@@ -7928,9 +7928,9 @@
                 <a:solidFill>
                   <a:srgbClr val="2D3436"/>
                 </a:solidFill>
-                <a:latin typeface="Arial" pitchFamily="34" charset="0"/>
-                <a:ea typeface="Arial" pitchFamily="34" charset="-122"/>
-                <a:cs typeface="Arial" pitchFamily="34" charset="-120"/>
+                <a:latin typeface="Segoe UI" pitchFamily="34" charset="0"/>
+                <a:ea typeface="Segoe UI" pitchFamily="34" charset="-122"/>
+                <a:cs typeface="Segoe UI" pitchFamily="34" charset="-120"/>
               </a:rPr>
               <a:t>9. Tabrizi N, et al. Seizure. 2025;127:66-70</a:t>
             </a:r>
@@ -7967,9 +7967,9 @@
                 <a:solidFill>
                   <a:srgbClr val="2D3436"/>
                 </a:solidFill>
-                <a:latin typeface="Arial" pitchFamily="34" charset="0"/>
-                <a:ea typeface="Arial" pitchFamily="34" charset="-122"/>
-                <a:cs typeface="Arial" pitchFamily="34" charset="-120"/>
+                <a:latin typeface="Segoe UI" pitchFamily="34" charset="0"/>
+                <a:ea typeface="Segoe UI" pitchFamily="34" charset="-122"/>
+                <a:cs typeface="Segoe UI" pitchFamily="34" charset="-120"/>
               </a:rPr>
               <a:t>10. Stephen LJ, Brodie MJ. CNS Drugs. 2020;34(2):147-161</a:t>
             </a:r>
@@ -8006,9 +8006,9 @@
                 <a:solidFill>
                   <a:srgbClr val="2D3436"/>
                 </a:solidFill>
-                <a:latin typeface="Arial" pitchFamily="34" charset="0"/>
-                <a:ea typeface="Arial" pitchFamily="34" charset="-122"/>
-                <a:cs typeface="Arial" pitchFamily="34" charset="-120"/>
+                <a:latin typeface="Segoe UI" pitchFamily="34" charset="0"/>
+                <a:ea typeface="Segoe UI" pitchFamily="34" charset="-122"/>
+                <a:cs typeface="Segoe UI" pitchFamily="34" charset="-120"/>
               </a:rPr>
               <a:t>11. Strzelczyk A, et al. Epilepsia. 2018;59(8):1549-1556</a:t>
             </a:r>
@@ -8045,9 +8045,9 @@
                 <a:solidFill>
                   <a:srgbClr val="2D3436"/>
                 </a:solidFill>
-                <a:latin typeface="Arial" pitchFamily="34" charset="0"/>
-                <a:ea typeface="Arial" pitchFamily="34" charset="-122"/>
-                <a:cs typeface="Arial" pitchFamily="34" charset="-120"/>
+                <a:latin typeface="Segoe UI" pitchFamily="34" charset="0"/>
+                <a:ea typeface="Segoe UI" pitchFamily="34" charset="-122"/>
+                <a:cs typeface="Segoe UI" pitchFamily="34" charset="-120"/>
               </a:rPr>
               <a:t>12. Woodrich N, et al. Epilepsia Open. 2025;10(6):1871-1882</a:t>
             </a:r>
@@ -8084,9 +8084,9 @@
                 <a:solidFill>
                   <a:srgbClr val="2D3436"/>
                 </a:solidFill>
-                <a:latin typeface="Arial" pitchFamily="34" charset="0"/>
-                <a:ea typeface="Arial" pitchFamily="34" charset="-122"/>
-                <a:cs typeface="Arial" pitchFamily="34" charset="-120"/>
+                <a:latin typeface="Segoe UI" pitchFamily="34" charset="0"/>
+                <a:ea typeface="Segoe UI" pitchFamily="34" charset="-122"/>
+                <a:cs typeface="Segoe UI" pitchFamily="34" charset="-120"/>
               </a:rPr>
               <a:t>13. Choudhury C, et al. Cureus. 2024;16(9):e69228</a:t>
             </a:r>
@@ -8123,9 +8123,9 @@
                 <a:solidFill>
                   <a:srgbClr val="2D3436"/>
                 </a:solidFill>
-                <a:latin typeface="Arial" pitchFamily="34" charset="0"/>
-                <a:ea typeface="Arial" pitchFamily="34" charset="-122"/>
-                <a:cs typeface="Arial" pitchFamily="34" charset="-120"/>
+                <a:latin typeface="Segoe UI" pitchFamily="34" charset="0"/>
+                <a:ea typeface="Segoe UI" pitchFamily="34" charset="-122"/>
+                <a:cs typeface="Segoe UI" pitchFamily="34" charset="-120"/>
               </a:rPr>
               <a:t>14. Ustun D, et al. Epilepsy Res. 2026;222:107753</a:t>
             </a:r>
@@ -8162,9 +8162,9 @@
                 <a:solidFill>
                   <a:srgbClr val="636E72"/>
                 </a:solidFill>
-                <a:latin typeface="Arial" pitchFamily="34" charset="0"/>
-                <a:ea typeface="Arial" pitchFamily="34" charset="-122"/>
-                <a:cs typeface="Arial" pitchFamily="34" charset="-120"/>
+                <a:latin typeface="BIZ UDPGothic" pitchFamily="34" charset="0"/>
+                <a:ea typeface="BIZ UDPGothic" pitchFamily="34" charset="-122"/>
+                <a:cs typeface="BIZ UDPGothic" pitchFamily="34" charset="-120"/>
               </a:rPr>
               <a:t>16/16</a:t>
             </a:r>
@@ -8249,17 +8249,17 @@
               <a:buNone/>
             </a:pPr>
             <a:r>
-              <a:rPr lang="en-US" sz="2800" b="1" dirty="0">
+              <a:rPr lang="en-US" sz="2400" b="1" dirty="0">
                 <a:solidFill>
                   <a:srgbClr val="FFFFFF"/>
                 </a:solidFill>
-                <a:latin typeface="Arial Black" pitchFamily="34" charset="0"/>
-                <a:ea typeface="Arial Black" pitchFamily="34" charset="-122"/>
-                <a:cs typeface="Arial Black" pitchFamily="34" charset="-120"/>
+                <a:latin typeface="BIZ UDPGothic" pitchFamily="34" charset="0"/>
+                <a:ea typeface="BIZ UDPGothic" pitchFamily="34" charset="-122"/>
+                <a:cs typeface="BIZ UDPGothic" pitchFamily="34" charset="-120"/>
               </a:rPr>
               <a:t>疫学 ― 思ったより多い「よくあるてんかん」</a:t>
             </a:r>
-            <a:endParaRPr lang="en-US" sz="2800" dirty="0"/>
+            <a:endParaRPr lang="en-US" sz="2400" dirty="0"/>
           </a:p>
         </p:txBody>
       </p:sp>
@@ -8315,17 +8315,17 @@
               <a:buNone/>
             </a:pPr>
             <a:r>
-              <a:rPr lang="en-US" sz="2600" b="1" dirty="0">
+              <a:rPr lang="en-US" sz="2400" b="1" dirty="0">
                 <a:solidFill>
                   <a:srgbClr val="2C5AA0"/>
                 </a:solidFill>
-                <a:latin typeface="Arial Black" pitchFamily="34" charset="0"/>
-                <a:ea typeface="Arial Black" pitchFamily="34" charset="-122"/>
-                <a:cs typeface="Arial Black" pitchFamily="34" charset="-120"/>
+                <a:latin typeface="Segoe UI" pitchFamily="34" charset="0"/>
+                <a:ea typeface="Segoe UI" pitchFamily="34" charset="-122"/>
+                <a:cs typeface="Segoe UI" pitchFamily="34" charset="-120"/>
               </a:rPr>
               <a:t>5〜10%</a:t>
             </a:r>
-            <a:endParaRPr lang="en-US" sz="2600" dirty="0"/>
+            <a:endParaRPr lang="en-US" sz="2400" dirty="0"/>
           </a:p>
         </p:txBody>
       </p:sp>
@@ -8358,9 +8358,9 @@
                 <a:solidFill>
                   <a:srgbClr val="2D3436"/>
                 </a:solidFill>
-                <a:latin typeface="Arial" pitchFamily="34" charset="0"/>
-                <a:ea typeface="Arial" pitchFamily="34" charset="-122"/>
-                <a:cs typeface="Arial" pitchFamily="34" charset="-120"/>
+                <a:latin typeface="BIZ UDPGothic" pitchFamily="34" charset="0"/>
+                <a:ea typeface="BIZ UDPGothic" pitchFamily="34" charset="-122"/>
+                <a:cs typeface="BIZ UDPGothic" pitchFamily="34" charset="-120"/>
               </a:rPr>
               <a:t>全てんかんに</a:t>
             </a:r>
@@ -8375,9 +8375,9 @@
                 <a:solidFill>
                   <a:srgbClr val="2D3436"/>
                 </a:solidFill>
-                <a:latin typeface="Arial" pitchFamily="34" charset="0"/>
-                <a:ea typeface="Arial" pitchFamily="34" charset="-122"/>
-                <a:cs typeface="Arial" pitchFamily="34" charset="-120"/>
+                <a:latin typeface="BIZ UDPGothic" pitchFamily="34" charset="0"/>
+                <a:ea typeface="BIZ UDPGothic" pitchFamily="34" charset="-122"/>
+                <a:cs typeface="BIZ UDPGothic" pitchFamily="34" charset="-120"/>
               </a:rPr>
               <a:t>占める割合</a:t>
             </a:r>
@@ -8437,17 +8437,17 @@
               <a:buNone/>
             </a:pPr>
             <a:r>
-              <a:rPr lang="en-US" sz="2600" b="1" dirty="0">
+              <a:rPr lang="en-US" sz="2400" b="1" dirty="0">
                 <a:solidFill>
                   <a:srgbClr val="2C5AA0"/>
                 </a:solidFill>
-                <a:latin typeface="Arial Black" pitchFamily="34" charset="0"/>
-                <a:ea typeface="Arial Black" pitchFamily="34" charset="-122"/>
-                <a:cs typeface="Arial Black" pitchFamily="34" charset="-120"/>
+                <a:latin typeface="Segoe UI" pitchFamily="34" charset="0"/>
+                <a:ea typeface="Segoe UI" pitchFamily="34" charset="-122"/>
+                <a:cs typeface="Segoe UI" pitchFamily="34" charset="-120"/>
               </a:rPr>
               <a:t>0.4/1000</a:t>
             </a:r>
-            <a:endParaRPr lang="en-US" sz="2600" dirty="0"/>
+            <a:endParaRPr lang="en-US" sz="2400" dirty="0"/>
           </a:p>
         </p:txBody>
       </p:sp>
@@ -8480,9 +8480,9 @@
                 <a:solidFill>
                   <a:srgbClr val="2D3436"/>
                 </a:solidFill>
-                <a:latin typeface="Arial" pitchFamily="34" charset="0"/>
-                <a:ea typeface="Arial" pitchFamily="34" charset="-122"/>
-                <a:cs typeface="Arial" pitchFamily="34" charset="-120"/>
+                <a:latin typeface="BIZ UDPGothic" pitchFamily="34" charset="0"/>
+                <a:ea typeface="BIZ UDPGothic" pitchFamily="34" charset="-122"/>
+                <a:cs typeface="BIZ UDPGothic" pitchFamily="34" charset="-120"/>
               </a:rPr>
               <a:t>成人での</a:t>
             </a:r>
@@ -8497,9 +8497,9 @@
                 <a:solidFill>
                   <a:srgbClr val="2D3436"/>
                 </a:solidFill>
-                <a:latin typeface="Arial" pitchFamily="34" charset="0"/>
-                <a:ea typeface="Arial" pitchFamily="34" charset="-122"/>
-                <a:cs typeface="Arial" pitchFamily="34" charset="-120"/>
+                <a:latin typeface="BIZ UDPGothic" pitchFamily="34" charset="0"/>
+                <a:ea typeface="BIZ UDPGothic" pitchFamily="34" charset="-122"/>
+                <a:cs typeface="BIZ UDPGothic" pitchFamily="34" charset="-120"/>
               </a:rPr>
               <a:t>有病率</a:t>
             </a:r>
@@ -8559,17 +8559,17 @@
               <a:buNone/>
             </a:pPr>
             <a:r>
-              <a:rPr lang="en-US" sz="2600" b="1" dirty="0">
+              <a:rPr lang="en-US" sz="2400" b="1" dirty="0">
                 <a:solidFill>
                   <a:srgbClr val="2C5AA0"/>
                 </a:solidFill>
-                <a:latin typeface="Arial Black" pitchFamily="34" charset="0"/>
-                <a:ea typeface="Arial Black" pitchFamily="34" charset="-122"/>
-                <a:cs typeface="Arial Black" pitchFamily="34" charset="-120"/>
+                <a:latin typeface="Segoe UI" pitchFamily="34" charset="0"/>
+                <a:ea typeface="Segoe UI" pitchFamily="34" charset="-122"/>
+                <a:cs typeface="Segoe UI" pitchFamily="34" charset="-120"/>
               </a:rPr>
               <a:t>12〜18歳</a:t>
             </a:r>
-            <a:endParaRPr lang="en-US" sz="2600" dirty="0"/>
+            <a:endParaRPr lang="en-US" sz="2400" dirty="0"/>
           </a:p>
         </p:txBody>
       </p:sp>
@@ -8602,9 +8602,9 @@
                 <a:solidFill>
                   <a:srgbClr val="2D3436"/>
                 </a:solidFill>
-                <a:latin typeface="Arial" pitchFamily="34" charset="0"/>
-                <a:ea typeface="Arial" pitchFamily="34" charset="-122"/>
-                <a:cs typeface="Arial" pitchFamily="34" charset="-120"/>
+                <a:latin typeface="BIZ UDPGothic" pitchFamily="34" charset="0"/>
+                <a:ea typeface="BIZ UDPGothic" pitchFamily="34" charset="-122"/>
+                <a:cs typeface="BIZ UDPGothic" pitchFamily="34" charset="-120"/>
               </a:rPr>
               <a:t>発症年齢の</a:t>
             </a:r>
@@ -8619,9 +8619,9 @@
                 <a:solidFill>
                   <a:srgbClr val="2D3436"/>
                 </a:solidFill>
-                <a:latin typeface="Arial" pitchFamily="34" charset="0"/>
-                <a:ea typeface="Arial" pitchFamily="34" charset="-122"/>
-                <a:cs typeface="Arial" pitchFamily="34" charset="-120"/>
+                <a:latin typeface="BIZ UDPGothic" pitchFamily="34" charset="0"/>
+                <a:ea typeface="BIZ UDPGothic" pitchFamily="34" charset="-122"/>
+                <a:cs typeface="BIZ UDPGothic" pitchFamily="34" charset="-120"/>
               </a:rPr>
               <a:t>ピーク</a:t>
             </a:r>
@@ -8681,17 +8681,17 @@
               <a:buNone/>
             </a:pPr>
             <a:r>
-              <a:rPr lang="en-US" sz="2600" b="1" dirty="0">
+              <a:rPr lang="en-US" sz="2400" b="1" dirty="0">
                 <a:solidFill>
                   <a:srgbClr val="2C5AA0"/>
                 </a:solidFill>
-                <a:latin typeface="Arial Black" pitchFamily="34" charset="0"/>
-                <a:ea typeface="Arial Black" pitchFamily="34" charset="-122"/>
-                <a:cs typeface="Arial Black" pitchFamily="34" charset="-120"/>
+                <a:latin typeface="Segoe UI" pitchFamily="34" charset="0"/>
+                <a:ea typeface="Segoe UI" pitchFamily="34" charset="-122"/>
+                <a:cs typeface="Segoe UI" pitchFamily="34" charset="-120"/>
               </a:rPr>
               <a:t>~50%</a:t>
             </a:r>
-            <a:endParaRPr lang="en-US" sz="2600" dirty="0"/>
+            <a:endParaRPr lang="en-US" sz="2400" dirty="0"/>
           </a:p>
         </p:txBody>
       </p:sp>
@@ -8724,9 +8724,9 @@
                 <a:solidFill>
                   <a:srgbClr val="2D3436"/>
                 </a:solidFill>
-                <a:latin typeface="Arial" pitchFamily="34" charset="0"/>
-                <a:ea typeface="Arial" pitchFamily="34" charset="-122"/>
-                <a:cs typeface="Arial" pitchFamily="34" charset="-120"/>
+                <a:latin typeface="BIZ UDPGothic" pitchFamily="34" charset="0"/>
+                <a:ea typeface="BIZ UDPGothic" pitchFamily="34" charset="-122"/>
+                <a:cs typeface="BIZ UDPGothic" pitchFamily="34" charset="-120"/>
               </a:rPr>
               <a:t>家族歴</a:t>
             </a:r>
@@ -8741,9 +8741,9 @@
                 <a:solidFill>
                   <a:srgbClr val="2D3436"/>
                 </a:solidFill>
-                <a:latin typeface="Arial" pitchFamily="34" charset="0"/>
-                <a:ea typeface="Arial" pitchFamily="34" charset="-122"/>
-                <a:cs typeface="Arial" pitchFamily="34" charset="-120"/>
+                <a:latin typeface="BIZ UDPGothic" pitchFamily="34" charset="0"/>
+                <a:ea typeface="BIZ UDPGothic" pitchFamily="34" charset="-122"/>
+                <a:cs typeface="BIZ UDPGothic" pitchFamily="34" charset="-120"/>
               </a:rPr>
               <a:t>あり</a:t>
             </a:r>
@@ -8807,9 +8807,9 @@
                 <a:solidFill>
                   <a:srgbClr val="2C5AA0"/>
                 </a:solidFill>
-                <a:latin typeface="Arial Black" pitchFamily="34" charset="0"/>
-                <a:ea typeface="Arial Black" pitchFamily="34" charset="-122"/>
-                <a:cs typeface="Arial Black" pitchFamily="34" charset="-120"/>
+                <a:latin typeface="BIZ UDPGothic" pitchFamily="34" charset="0"/>
+                <a:ea typeface="BIZ UDPGothic" pitchFamily="34" charset="-122"/>
+                <a:cs typeface="BIZ UDPGothic" pitchFamily="34" charset="-120"/>
               </a:rPr>
               <a:t>遺伝学的背景</a:t>
             </a:r>
@@ -8849,9 +8849,9 @@
                 <a:solidFill>
                   <a:srgbClr val="2D3436"/>
                 </a:solidFill>
-                <a:latin typeface="Arial" pitchFamily="34" charset="0"/>
-                <a:ea typeface="Arial" pitchFamily="34" charset="-122"/>
-                <a:cs typeface="Arial" pitchFamily="34" charset="-120"/>
+                <a:latin typeface="BIZ UDPGothic" pitchFamily="34" charset="0"/>
+                <a:ea typeface="BIZ UDPGothic" pitchFamily="34" charset="-122"/>
+                <a:cs typeface="BIZ UDPGothic" pitchFamily="34" charset="-120"/>
               </a:rPr>
               <a:t>遺伝形式: </a:t>
             </a:r>
@@ -8866,9 +8866,9 @@
                 <a:solidFill>
                   <a:srgbClr val="2D3436"/>
                 </a:solidFill>
-                <a:latin typeface="Arial" pitchFamily="34" charset="0"/>
-                <a:ea typeface="Arial" pitchFamily="34" charset="-122"/>
-                <a:cs typeface="Arial" pitchFamily="34" charset="-120"/>
+                <a:latin typeface="BIZ UDPGothic" pitchFamily="34" charset="0"/>
+                <a:ea typeface="BIZ UDPGothic" pitchFamily="34" charset="-122"/>
+                <a:cs typeface="BIZ UDPGothic" pitchFamily="34" charset="-120"/>
               </a:rPr>
               <a:t>多因子遺伝（polygenic）が主体</a:t>
             </a:r>
@@ -8886,9 +8886,9 @@
                 <a:solidFill>
                   <a:srgbClr val="2D3436"/>
                 </a:solidFill>
-                <a:latin typeface="Arial" pitchFamily="34" charset="0"/>
-                <a:ea typeface="Arial" pitchFamily="34" charset="-122"/>
-                <a:cs typeface="Arial" pitchFamily="34" charset="-120"/>
+                <a:latin typeface="BIZ UDPGothic" pitchFamily="34" charset="0"/>
+                <a:ea typeface="BIZ UDPGothic" pitchFamily="34" charset="-122"/>
+                <a:cs typeface="BIZ UDPGothic" pitchFamily="34" charset="-120"/>
               </a:rPr>
               <a:t>GWAS感受性座位: </a:t>
             </a:r>
@@ -8903,9 +8903,9 @@
                 <a:solidFill>
                   <a:srgbClr val="2D3436"/>
                 </a:solidFill>
-                <a:latin typeface="Arial" pitchFamily="34" charset="0"/>
-                <a:ea typeface="Arial" pitchFamily="34" charset="-122"/>
-                <a:cs typeface="Arial" pitchFamily="34" charset="-120"/>
+                <a:latin typeface="Segoe UI" pitchFamily="34" charset="0"/>
+                <a:ea typeface="Segoe UI" pitchFamily="34" charset="-122"/>
+                <a:cs typeface="Segoe UI" pitchFamily="34" charset="-120"/>
               </a:rPr>
               <a:t>4p12, 8q23.1, 16p11.2（JME特異的）</a:t>
             </a:r>
@@ -8923,9 +8923,9 @@
                 <a:solidFill>
                   <a:srgbClr val="2D3436"/>
                 </a:solidFill>
-                <a:latin typeface="Arial" pitchFamily="34" charset="0"/>
-                <a:ea typeface="Arial" pitchFamily="34" charset="-122"/>
-                <a:cs typeface="Arial" pitchFamily="34" charset="-120"/>
+                <a:latin typeface="BIZ UDPGothic" pitchFamily="34" charset="0"/>
+                <a:ea typeface="BIZ UDPGothic" pitchFamily="34" charset="-122"/>
+                <a:cs typeface="BIZ UDPGothic" pitchFamily="34" charset="-120"/>
               </a:rPr>
               <a:t>病態基盤: </a:t>
             </a:r>
@@ -8940,9 +8940,9 @@
                 <a:solidFill>
                   <a:srgbClr val="2D3436"/>
                 </a:solidFill>
-                <a:latin typeface="Arial" pitchFamily="34" charset="0"/>
-                <a:ea typeface="Arial" pitchFamily="34" charset="-122"/>
-                <a:cs typeface="Arial" pitchFamily="34" charset="-120"/>
+                <a:latin typeface="BIZ UDPGothic" pitchFamily="34" charset="0"/>
+                <a:ea typeface="BIZ UDPGothic" pitchFamily="34" charset="-122"/>
+                <a:cs typeface="BIZ UDPGothic" pitchFamily="34" charset="-120"/>
               </a:rPr>
               <a:t>前頭-視床-皮質ネットワークの遺伝的異常</a:t>
             </a:r>
@@ -8979,9 +8979,9 @@
                 <a:solidFill>
                   <a:srgbClr val="636E72"/>
                 </a:solidFill>
-                <a:latin typeface="Arial" pitchFamily="34" charset="0"/>
-                <a:ea typeface="Arial" pitchFamily="34" charset="-122"/>
-                <a:cs typeface="Arial" pitchFamily="34" charset="-120"/>
+                <a:latin typeface="BIZ UDPGothic" pitchFamily="34" charset="0"/>
+                <a:ea typeface="BIZ UDPGothic" pitchFamily="34" charset="-122"/>
+                <a:cs typeface="BIZ UDPGothic" pitchFamily="34" charset="-120"/>
               </a:rPr>
               <a:t>2/15</a:t>
             </a:r>
@@ -9066,17 +9066,17 @@
               <a:buNone/>
             </a:pPr>
             <a:r>
-              <a:rPr lang="en-US" sz="2800" b="1" dirty="0">
+              <a:rPr lang="en-US" sz="2400" b="1" dirty="0">
                 <a:solidFill>
                   <a:srgbClr val="FFFFFF"/>
                 </a:solidFill>
-                <a:latin typeface="Arial Black" pitchFamily="34" charset="0"/>
-                <a:ea typeface="Arial Black" pitchFamily="34" charset="-122"/>
-                <a:cs typeface="Arial Black" pitchFamily="34" charset="-120"/>
+                <a:latin typeface="BIZ UDPGothic" pitchFamily="34" charset="0"/>
+                <a:ea typeface="BIZ UDPGothic" pitchFamily="34" charset="-122"/>
+                <a:cs typeface="BIZ UDPGothic" pitchFamily="34" charset="-120"/>
               </a:rPr>
               <a:t>臨床的特徴 ― 3つの発作型</a:t>
             </a:r>
-            <a:endParaRPr lang="en-US" sz="2800" dirty="0"/>
+            <a:endParaRPr lang="en-US" sz="2400" dirty="0"/>
           </a:p>
         </p:txBody>
       </p:sp>
@@ -9156,9 +9156,9 @@
                 <a:solidFill>
                   <a:srgbClr val="FFFFFF"/>
                 </a:solidFill>
-                <a:latin typeface="Arial Black" pitchFamily="34" charset="0"/>
-                <a:ea typeface="Arial Black" pitchFamily="34" charset="-122"/>
-                <a:cs typeface="Arial Black" pitchFamily="34" charset="-120"/>
+                <a:latin typeface="BIZ UDPGothic" pitchFamily="34" charset="0"/>
+                <a:ea typeface="BIZ UDPGothic" pitchFamily="34" charset="-122"/>
+                <a:cs typeface="BIZ UDPGothic" pitchFamily="34" charset="-120"/>
               </a:rPr>
               <a:t>ミオクロニー発作</a:t>
             </a:r>
@@ -9215,9 +9215,9 @@
                 <a:solidFill>
                   <a:srgbClr val="2C5AA0"/>
                 </a:solidFill>
-                <a:latin typeface="Arial Black" pitchFamily="34" charset="0"/>
-                <a:ea typeface="Arial Black" pitchFamily="34" charset="-122"/>
-                <a:cs typeface="Arial Black" pitchFamily="34" charset="-120"/>
+                <a:latin typeface="Segoe UI" pitchFamily="34" charset="0"/>
+                <a:ea typeface="Segoe UI" pitchFamily="34" charset="-122"/>
+                <a:cs typeface="Segoe UI" pitchFamily="34" charset="-120"/>
               </a:rPr>
               <a:t>100%</a:t>
             </a:r>
@@ -9254,9 +9254,9 @@
                 <a:solidFill>
                   <a:srgbClr val="2D3436"/>
                 </a:solidFill>
-                <a:latin typeface="Arial" pitchFamily="34" charset="0"/>
-                <a:ea typeface="Arial" pitchFamily="34" charset="-122"/>
-                <a:cs typeface="Arial" pitchFamily="34" charset="-120"/>
+                <a:latin typeface="BIZ UDPGothic" pitchFamily="34" charset="0"/>
+                <a:ea typeface="BIZ UDPGothic" pitchFamily="34" charset="-122"/>
+                <a:cs typeface="BIZ UDPGothic" pitchFamily="34" charset="-120"/>
               </a:rPr>
               <a:t>覚醒直後の両側上肢の</a:t>
             </a:r>
@@ -9271,9 +9271,9 @@
                 <a:solidFill>
                   <a:srgbClr val="2D3436"/>
                 </a:solidFill>
-                <a:latin typeface="Arial" pitchFamily="34" charset="0"/>
-                <a:ea typeface="Arial" pitchFamily="34" charset="-122"/>
-                <a:cs typeface="Arial" pitchFamily="34" charset="-120"/>
+                <a:latin typeface="BIZ UDPGothic" pitchFamily="34" charset="0"/>
+                <a:ea typeface="BIZ UDPGothic" pitchFamily="34" charset="-122"/>
+                <a:cs typeface="BIZ UDPGothic" pitchFamily="34" charset="-120"/>
               </a:rPr>
               <a:t>ピクつき</a:t>
             </a:r>
@@ -9288,9 +9288,9 @@
                 <a:solidFill>
                   <a:srgbClr val="2D3436"/>
                 </a:solidFill>
-                <a:latin typeface="Arial" pitchFamily="34" charset="0"/>
-                <a:ea typeface="Arial" pitchFamily="34" charset="-122"/>
-                <a:cs typeface="Arial" pitchFamily="34" charset="-120"/>
+                <a:latin typeface="BIZ UDPGothic" pitchFamily="34" charset="0"/>
+                <a:ea typeface="BIZ UDPGothic" pitchFamily="34" charset="-122"/>
+                <a:cs typeface="BIZ UDPGothic" pitchFamily="34" charset="-120"/>
               </a:rPr>
               <a:t>意識は保持される</a:t>
             </a:r>
@@ -9374,9 +9374,9 @@
                 <a:solidFill>
                   <a:srgbClr val="FFFFFF"/>
                 </a:solidFill>
-                <a:latin typeface="Arial Black" pitchFamily="34" charset="0"/>
-                <a:ea typeface="Arial Black" pitchFamily="34" charset="-122"/>
-                <a:cs typeface="Arial Black" pitchFamily="34" charset="-120"/>
+                <a:latin typeface="BIZ UDPGothic" pitchFamily="34" charset="0"/>
+                <a:ea typeface="BIZ UDPGothic" pitchFamily="34" charset="-122"/>
+                <a:cs typeface="BIZ UDPGothic" pitchFamily="34" charset="-120"/>
               </a:rPr>
               <a:t>GTCS</a:t>
             </a:r>
@@ -9391,9 +9391,9 @@
                 <a:solidFill>
                   <a:srgbClr val="FFFFFF"/>
                 </a:solidFill>
-                <a:latin typeface="Arial Black" pitchFamily="34" charset="0"/>
-                <a:ea typeface="Arial Black" pitchFamily="34" charset="-122"/>
-                <a:cs typeface="Arial Black" pitchFamily="34" charset="-120"/>
+                <a:latin typeface="BIZ UDPGothic" pitchFamily="34" charset="0"/>
+                <a:ea typeface="BIZ UDPGothic" pitchFamily="34" charset="-122"/>
+                <a:cs typeface="BIZ UDPGothic" pitchFamily="34" charset="-120"/>
               </a:rPr>
               <a:t>（強直間代発作）</a:t>
             </a:r>
@@ -9450,9 +9450,9 @@
                 <a:solidFill>
                   <a:srgbClr val="DC3545"/>
                 </a:solidFill>
-                <a:latin typeface="Arial Black" pitchFamily="34" charset="0"/>
-                <a:ea typeface="Arial Black" pitchFamily="34" charset="-122"/>
-                <a:cs typeface="Arial Black" pitchFamily="34" charset="-120"/>
+                <a:latin typeface="Segoe UI" pitchFamily="34" charset="0"/>
+                <a:ea typeface="Segoe UI" pitchFamily="34" charset="-122"/>
+                <a:cs typeface="Segoe UI" pitchFamily="34" charset="-120"/>
               </a:rPr>
               <a:t>80〜95%</a:t>
             </a:r>
@@ -9489,9 +9489,9 @@
                 <a:solidFill>
                   <a:srgbClr val="2D3436"/>
                 </a:solidFill>
-                <a:latin typeface="Arial" pitchFamily="34" charset="0"/>
-                <a:ea typeface="Arial" pitchFamily="34" charset="-122"/>
-                <a:cs typeface="Arial" pitchFamily="34" charset="-120"/>
+                <a:latin typeface="BIZ UDPGothic" pitchFamily="34" charset="0"/>
+                <a:ea typeface="BIZ UDPGothic" pitchFamily="34" charset="-122"/>
+                <a:cs typeface="BIZ UDPGothic" pitchFamily="34" charset="-120"/>
               </a:rPr>
               <a:t>ミオクロニー発作の</a:t>
             </a:r>
@@ -9506,9 +9506,9 @@
                 <a:solidFill>
                   <a:srgbClr val="2D3436"/>
                 </a:solidFill>
-                <a:latin typeface="Arial" pitchFamily="34" charset="0"/>
-                <a:ea typeface="Arial" pitchFamily="34" charset="-122"/>
-                <a:cs typeface="Arial" pitchFamily="34" charset="-120"/>
+                <a:latin typeface="BIZ UDPGothic" pitchFamily="34" charset="0"/>
+                <a:ea typeface="BIZ UDPGothic" pitchFamily="34" charset="-122"/>
+                <a:cs typeface="BIZ UDPGothic" pitchFamily="34" charset="-120"/>
               </a:rPr>
               <a:t>数年後に出現</a:t>
             </a:r>
@@ -9523,9 +9523,9 @@
                 <a:solidFill>
                   <a:srgbClr val="2D3436"/>
                 </a:solidFill>
-                <a:latin typeface="Arial" pitchFamily="34" charset="0"/>
-                <a:ea typeface="Arial" pitchFamily="34" charset="-122"/>
-                <a:cs typeface="Arial" pitchFamily="34" charset="-120"/>
+                <a:latin typeface="BIZ UDPGothic" pitchFamily="34" charset="0"/>
+                <a:ea typeface="BIZ UDPGothic" pitchFamily="34" charset="-122"/>
+                <a:cs typeface="BIZ UDPGothic" pitchFamily="34" charset="-120"/>
               </a:rPr>
               <a:t>診断契機となることが最多</a:t>
             </a:r>
@@ -9609,9 +9609,9 @@
                 <a:solidFill>
                   <a:srgbClr val="FFFFFF"/>
                 </a:solidFill>
-                <a:latin typeface="Arial Black" pitchFamily="34" charset="0"/>
-                <a:ea typeface="Arial Black" pitchFamily="34" charset="-122"/>
-                <a:cs typeface="Arial Black" pitchFamily="34" charset="-120"/>
+                <a:latin typeface="BIZ UDPGothic" pitchFamily="34" charset="0"/>
+                <a:ea typeface="BIZ UDPGothic" pitchFamily="34" charset="-122"/>
+                <a:cs typeface="BIZ UDPGothic" pitchFamily="34" charset="-120"/>
               </a:rPr>
               <a:t>欠神発作</a:t>
             </a:r>
@@ -9668,9 +9668,9 @@
                 <a:solidFill>
                   <a:srgbClr val="E8850C"/>
                 </a:solidFill>
-                <a:latin typeface="Arial Black" pitchFamily="34" charset="0"/>
-                <a:ea typeface="Arial Black" pitchFamily="34" charset="-122"/>
-                <a:cs typeface="Arial Black" pitchFamily="34" charset="-120"/>
+                <a:latin typeface="Segoe UI" pitchFamily="34" charset="0"/>
+                <a:ea typeface="Segoe UI" pitchFamily="34" charset="-122"/>
+                <a:cs typeface="Segoe UI" pitchFamily="34" charset="-120"/>
               </a:rPr>
               <a:t>10〜40%</a:t>
             </a:r>
@@ -9707,9 +9707,9 @@
                 <a:solidFill>
                   <a:srgbClr val="2D3436"/>
                 </a:solidFill>
-                <a:latin typeface="Arial" pitchFamily="34" charset="0"/>
-                <a:ea typeface="Arial" pitchFamily="34" charset="-122"/>
-                <a:cs typeface="Arial" pitchFamily="34" charset="-120"/>
+                <a:latin typeface="BIZ UDPGothic" pitchFamily="34" charset="0"/>
+                <a:ea typeface="BIZ UDPGothic" pitchFamily="34" charset="-122"/>
+                <a:cs typeface="BIZ UDPGothic" pitchFamily="34" charset="-120"/>
               </a:rPr>
               <a:t>短時間の意識消失</a:t>
             </a:r>
@@ -9724,9 +9724,9 @@
                 <a:solidFill>
                   <a:srgbClr val="2D3436"/>
                 </a:solidFill>
-                <a:latin typeface="Arial" pitchFamily="34" charset="0"/>
-                <a:ea typeface="Arial" pitchFamily="34" charset="-122"/>
-                <a:cs typeface="Arial" pitchFamily="34" charset="-120"/>
+                <a:latin typeface="BIZ UDPGothic" pitchFamily="34" charset="0"/>
+                <a:ea typeface="BIZ UDPGothic" pitchFamily="34" charset="-122"/>
+                <a:cs typeface="BIZ UDPGothic" pitchFamily="34" charset="-120"/>
               </a:rPr>
               <a:t>薬剤抵抗性の</a:t>
             </a:r>
@@ -9741,9 +9741,9 @@
                 <a:solidFill>
                   <a:srgbClr val="2D3436"/>
                 </a:solidFill>
-                <a:latin typeface="Arial" pitchFamily="34" charset="0"/>
-                <a:ea typeface="Arial" pitchFamily="34" charset="-122"/>
-                <a:cs typeface="Arial" pitchFamily="34" charset="-120"/>
+                <a:latin typeface="BIZ UDPGothic" pitchFamily="34" charset="0"/>
+                <a:ea typeface="BIZ UDPGothic" pitchFamily="34" charset="-122"/>
+                <a:cs typeface="BIZ UDPGothic" pitchFamily="34" charset="-120"/>
               </a:rPr>
               <a:t>リスク因子</a:t>
             </a:r>
@@ -9780,9 +9780,9 @@
                 <a:solidFill>
                   <a:srgbClr val="636E72"/>
                 </a:solidFill>
-                <a:latin typeface="Arial" pitchFamily="34" charset="0"/>
-                <a:ea typeface="Arial" pitchFamily="34" charset="-122"/>
-                <a:cs typeface="Arial" pitchFamily="34" charset="-120"/>
+                <a:latin typeface="BIZ UDPGothic" pitchFamily="34" charset="0"/>
+                <a:ea typeface="BIZ UDPGothic" pitchFamily="34" charset="-122"/>
+                <a:cs typeface="BIZ UDPGothic" pitchFamily="34" charset="-120"/>
               </a:rPr>
               <a:t>3/15</a:t>
             </a:r>
@@ -9867,17 +9867,17 @@
               <a:buNone/>
             </a:pPr>
             <a:r>
-              <a:rPr lang="en-US" sz="2800" b="1" dirty="0">
+              <a:rPr lang="en-US" sz="2400" b="1" dirty="0">
                 <a:solidFill>
                   <a:srgbClr val="FFFFFF"/>
                 </a:solidFill>
-                <a:latin typeface="Arial Black" pitchFamily="34" charset="0"/>
-                <a:ea typeface="Arial Black" pitchFamily="34" charset="-122"/>
-                <a:cs typeface="Arial Black" pitchFamily="34" charset="-120"/>
+                <a:latin typeface="BIZ UDPGothic" pitchFamily="34" charset="0"/>
+                <a:ea typeface="BIZ UDPGothic" pitchFamily="34" charset="-122"/>
+                <a:cs typeface="BIZ UDPGothic" pitchFamily="34" charset="-120"/>
               </a:rPr>
               <a:t>誘発因子</a:t>
             </a:r>
-            <a:endParaRPr lang="en-US" sz="2800" dirty="0"/>
+            <a:endParaRPr lang="en-US" sz="2400" dirty="0"/>
           </a:p>
         </p:txBody>
       </p:sp>
@@ -9957,9 +9957,9 @@
                 <a:solidFill>
                   <a:srgbClr val="2D3436"/>
                 </a:solidFill>
-                <a:latin typeface="Arial Black" pitchFamily="34" charset="0"/>
-                <a:ea typeface="Arial Black" pitchFamily="34" charset="-122"/>
-                <a:cs typeface="Arial Black" pitchFamily="34" charset="-120"/>
+                <a:latin typeface="BIZ UDPGothic" pitchFamily="34" charset="0"/>
+                <a:ea typeface="BIZ UDPGothic" pitchFamily="34" charset="-122"/>
+                <a:cs typeface="BIZ UDPGothic" pitchFamily="34" charset="-120"/>
               </a:rPr>
               <a:t>睡眠不足</a:t>
             </a:r>
@@ -9996,9 +9996,9 @@
                 <a:solidFill>
                   <a:srgbClr val="636E72"/>
                 </a:solidFill>
-                <a:latin typeface="Arial" pitchFamily="34" charset="0"/>
-                <a:ea typeface="Arial" pitchFamily="34" charset="-122"/>
-                <a:cs typeface="Arial" pitchFamily="34" charset="-120"/>
+                <a:latin typeface="BIZ UDPGothic" pitchFamily="34" charset="0"/>
+                <a:ea typeface="BIZ UDPGothic" pitchFamily="34" charset="-122"/>
+                <a:cs typeface="BIZ UDPGothic" pitchFamily="34" charset="-120"/>
               </a:rPr>
               <a:t>最重要。概日リズムとの関連が明確</a:t>
             </a:r>
@@ -10082,9 +10082,9 @@
                 <a:solidFill>
                   <a:srgbClr val="2D3436"/>
                 </a:solidFill>
-                <a:latin typeface="Arial Black" pitchFamily="34" charset="0"/>
-                <a:ea typeface="Arial Black" pitchFamily="34" charset="-122"/>
-                <a:cs typeface="Arial Black" pitchFamily="34" charset="-120"/>
+                <a:latin typeface="BIZ UDPGothic" pitchFamily="34" charset="0"/>
+                <a:ea typeface="BIZ UDPGothic" pitchFamily="34" charset="-122"/>
+                <a:cs typeface="BIZ UDPGothic" pitchFamily="34" charset="-120"/>
               </a:rPr>
               <a:t>アルコール</a:t>
             </a:r>
@@ -10121,9 +10121,9 @@
                 <a:solidFill>
                   <a:srgbClr val="636E72"/>
                 </a:solidFill>
-                <a:latin typeface="Arial" pitchFamily="34" charset="0"/>
-                <a:ea typeface="Arial" pitchFamily="34" charset="-122"/>
-                <a:cs typeface="Arial" pitchFamily="34" charset="-120"/>
+                <a:latin typeface="BIZ UDPGothic" pitchFamily="34" charset="0"/>
+                <a:ea typeface="BIZ UDPGothic" pitchFamily="34" charset="-122"/>
+                <a:cs typeface="BIZ UDPGothic" pitchFamily="34" charset="-120"/>
               </a:rPr>
               <a:t>過度の摂取で発作閾値が低下</a:t>
             </a:r>
@@ -10207,9 +10207,9 @@
                 <a:solidFill>
                   <a:srgbClr val="2D3436"/>
                 </a:solidFill>
-                <a:latin typeface="Arial Black" pitchFamily="34" charset="0"/>
-                <a:ea typeface="Arial Black" pitchFamily="34" charset="-122"/>
-                <a:cs typeface="Arial Black" pitchFamily="34" charset="-120"/>
+                <a:latin typeface="BIZ UDPGothic" pitchFamily="34" charset="0"/>
+                <a:ea typeface="BIZ UDPGothic" pitchFamily="34" charset="-122"/>
+                <a:cs typeface="BIZ UDPGothic" pitchFamily="34" charset="-120"/>
               </a:rPr>
               <a:t>ストレス・疲労</a:t>
             </a:r>
@@ -10246,9 +10246,9 @@
                 <a:solidFill>
                   <a:srgbClr val="636E72"/>
                 </a:solidFill>
-                <a:latin typeface="Arial" pitchFamily="34" charset="0"/>
-                <a:ea typeface="Arial" pitchFamily="34" charset="-122"/>
-                <a:cs typeface="Arial" pitchFamily="34" charset="-120"/>
+                <a:latin typeface="BIZ UDPGothic" pitchFamily="34" charset="0"/>
+                <a:ea typeface="BIZ UDPGothic" pitchFamily="34" charset="-122"/>
+                <a:cs typeface="BIZ UDPGothic" pitchFamily="34" charset="-120"/>
               </a:rPr>
               <a:t>精神的・身体的ストレス</a:t>
             </a:r>
@@ -10332,9 +10332,9 @@
                 <a:solidFill>
                   <a:srgbClr val="2D3436"/>
                 </a:solidFill>
-                <a:latin typeface="Arial Black" pitchFamily="34" charset="0"/>
-                <a:ea typeface="Arial Black" pitchFamily="34" charset="-122"/>
-                <a:cs typeface="Arial Black" pitchFamily="34" charset="-120"/>
+                <a:latin typeface="BIZ UDPGothic" pitchFamily="34" charset="0"/>
+                <a:ea typeface="BIZ UDPGothic" pitchFamily="34" charset="-122"/>
+                <a:cs typeface="BIZ UDPGothic" pitchFamily="34" charset="-120"/>
               </a:rPr>
               <a:t>光刺激</a:t>
             </a:r>
@@ -10371,9 +10371,9 @@
                 <a:solidFill>
                   <a:srgbClr val="636E72"/>
                 </a:solidFill>
-                <a:latin typeface="Arial" pitchFamily="34" charset="0"/>
-                <a:ea typeface="Arial" pitchFamily="34" charset="-122"/>
-                <a:cs typeface="Arial" pitchFamily="34" charset="-120"/>
+                <a:latin typeface="BIZ UDPGothic" pitchFamily="34" charset="0"/>
+                <a:ea typeface="BIZ UDPGothic" pitchFamily="34" charset="-122"/>
+                <a:cs typeface="BIZ UDPGothic" pitchFamily="34" charset="-120"/>
               </a:rPr>
               <a:t>光過敏性 30〜40%。脳波で光突発反応</a:t>
             </a:r>
@@ -10457,9 +10457,9 @@
                 <a:solidFill>
                   <a:srgbClr val="2D3436"/>
                 </a:solidFill>
-                <a:latin typeface="Arial Black" pitchFamily="34" charset="0"/>
-                <a:ea typeface="Arial Black" pitchFamily="34" charset="-122"/>
-                <a:cs typeface="Arial Black" pitchFamily="34" charset="-120"/>
+                <a:latin typeface="BIZ UDPGothic" pitchFamily="34" charset="0"/>
+                <a:ea typeface="BIZ UDPGothic" pitchFamily="34" charset="-122"/>
+                <a:cs typeface="BIZ UDPGothic" pitchFamily="34" charset="-120"/>
               </a:rPr>
               <a:t>月経周期</a:t>
             </a:r>
@@ -10496,9 +10496,9 @@
                 <a:solidFill>
                   <a:srgbClr val="636E72"/>
                 </a:solidFill>
-                <a:latin typeface="Arial" pitchFamily="34" charset="0"/>
-                <a:ea typeface="Arial" pitchFamily="34" charset="-122"/>
-                <a:cs typeface="Arial" pitchFamily="34" charset="-120"/>
+                <a:latin typeface="BIZ UDPGothic" pitchFamily="34" charset="0"/>
+                <a:ea typeface="BIZ UDPGothic" pitchFamily="34" charset="-122"/>
+                <a:cs typeface="BIZ UDPGothic" pitchFamily="34" charset="-120"/>
               </a:rPr>
               <a:t>catamenial seizures → 薬剤抵抗性リスク</a:t>
             </a:r>
@@ -10535,9 +10535,9 @@
                 <a:solidFill>
                   <a:srgbClr val="636E72"/>
                 </a:solidFill>
-                <a:latin typeface="Arial" pitchFamily="34" charset="0"/>
-                <a:ea typeface="Arial" pitchFamily="34" charset="-122"/>
-                <a:cs typeface="Arial" pitchFamily="34" charset="-120"/>
+                <a:latin typeface="BIZ UDPGothic" pitchFamily="34" charset="0"/>
+                <a:ea typeface="BIZ UDPGothic" pitchFamily="34" charset="-122"/>
+                <a:cs typeface="BIZ UDPGothic" pitchFamily="34" charset="-120"/>
               </a:rPr>
               <a:t>4/15</a:t>
             </a:r>
@@ -10622,17 +10622,17 @@
               <a:buNone/>
             </a:pPr>
             <a:r>
-              <a:rPr lang="en-US" sz="2800" b="1" dirty="0">
+              <a:rPr lang="en-US" sz="2400" b="1" dirty="0">
                 <a:solidFill>
                   <a:srgbClr val="FFFFFF"/>
                 </a:solidFill>
-                <a:latin typeface="Arial Black" pitchFamily="34" charset="0"/>
-                <a:ea typeface="Arial Black" pitchFamily="34" charset="-122"/>
-                <a:cs typeface="Arial Black" pitchFamily="34" charset="-120"/>
+                <a:latin typeface="BIZ UDPGothic" pitchFamily="34" charset="0"/>
+                <a:ea typeface="BIZ UDPGothic" pitchFamily="34" charset="-122"/>
+                <a:cs typeface="BIZ UDPGothic" pitchFamily="34" charset="-120"/>
               </a:rPr>
               <a:t>なぜ見逃されるのか？ ― 診断遅延の3大原因</a:t>
             </a:r>
-            <a:endParaRPr lang="en-US" sz="2800" dirty="0"/>
+            <a:endParaRPr lang="en-US" sz="2400" dirty="0"/>
           </a:p>
         </p:txBody>
       </p:sp>
@@ -10712,9 +10712,9 @@
                 <a:solidFill>
                   <a:srgbClr val="DC3545"/>
                 </a:solidFill>
-                <a:latin typeface="Arial Black" pitchFamily="34" charset="0"/>
-                <a:ea typeface="Arial Black" pitchFamily="34" charset="-122"/>
-                <a:cs typeface="Arial Black" pitchFamily="34" charset="-120"/>
+                <a:latin typeface="BIZ UDPGothic" pitchFamily="34" charset="0"/>
+                <a:ea typeface="BIZ UDPGothic" pitchFamily="34" charset="-122"/>
+                <a:cs typeface="BIZ UDPGothic" pitchFamily="34" charset="-120"/>
               </a:rPr>
               <a:t>発症から診断まで平均 8〜10年</a:t>
             </a:r>
@@ -10798,9 +10798,9 @@
                 <a:solidFill>
                   <a:srgbClr val="FFFFFF"/>
                 </a:solidFill>
-                <a:latin typeface="Arial Black" pitchFamily="34" charset="0"/>
-                <a:ea typeface="Arial Black" pitchFamily="34" charset="-122"/>
-                <a:cs typeface="Arial Black" pitchFamily="34" charset="-120"/>
+                <a:latin typeface="BIZ UDPGothic" pitchFamily="34" charset="0"/>
+                <a:ea typeface="BIZ UDPGothic" pitchFamily="34" charset="-122"/>
+                <a:cs typeface="BIZ UDPGothic" pitchFamily="34" charset="-120"/>
               </a:rPr>
               <a:t>1</a:t>
             </a:r>
@@ -10837,9 +10837,9 @@
                 <a:solidFill>
                   <a:srgbClr val="2D3436"/>
                 </a:solidFill>
-                <a:latin typeface="Arial" pitchFamily="34" charset="0"/>
-                <a:ea typeface="Arial" pitchFamily="34" charset="-122"/>
-                <a:cs typeface="Arial" pitchFamily="34" charset="-120"/>
+                <a:latin typeface="BIZ UDPGothic" pitchFamily="34" charset="0"/>
+                <a:ea typeface="BIZ UDPGothic" pitchFamily="34" charset="-122"/>
+                <a:cs typeface="BIZ UDPGothic" pitchFamily="34" charset="-120"/>
               </a:rPr>
               <a:t>患者がミオクロニー発作を</a:t>
             </a:r>
@@ -10854,9 +10854,9 @@
                 <a:solidFill>
                   <a:srgbClr val="2D3436"/>
                 </a:solidFill>
-                <a:latin typeface="Arial" pitchFamily="34" charset="0"/>
-                <a:ea typeface="Arial" pitchFamily="34" charset="-122"/>
-                <a:cs typeface="Arial" pitchFamily="34" charset="-120"/>
+                <a:latin typeface="BIZ UDPGothic" pitchFamily="34" charset="0"/>
+                <a:ea typeface="BIZ UDPGothic" pitchFamily="34" charset="-122"/>
+                <a:cs typeface="BIZ UDPGothic" pitchFamily="34" charset="-120"/>
               </a:rPr>
               <a:t>「病気」と認識していない</a:t>
             </a:r>
@@ -10893,9 +10893,9 @@
                 <a:solidFill>
                   <a:srgbClr val="636E72"/>
                 </a:solidFill>
-                <a:latin typeface="Arial" pitchFamily="34" charset="0"/>
-                <a:ea typeface="Arial" pitchFamily="34" charset="-122"/>
-                <a:cs typeface="Arial" pitchFamily="34" charset="-120"/>
+                <a:latin typeface="BIZ UDPGothic" pitchFamily="34" charset="0"/>
+                <a:ea typeface="BIZ UDPGothic" pitchFamily="34" charset="-122"/>
+                <a:cs typeface="BIZ UDPGothic" pitchFamily="34" charset="-120"/>
               </a:rPr>
               <a:t>「朝は体がだるくてピクピクする」</a:t>
             </a:r>
@@ -10979,9 +10979,9 @@
                 <a:solidFill>
                   <a:srgbClr val="FFFFFF"/>
                 </a:solidFill>
-                <a:latin typeface="Arial Black" pitchFamily="34" charset="0"/>
-                <a:ea typeface="Arial Black" pitchFamily="34" charset="-122"/>
-                <a:cs typeface="Arial Black" pitchFamily="34" charset="-120"/>
+                <a:latin typeface="BIZ UDPGothic" pitchFamily="34" charset="0"/>
+                <a:ea typeface="BIZ UDPGothic" pitchFamily="34" charset="-122"/>
+                <a:cs typeface="BIZ UDPGothic" pitchFamily="34" charset="-120"/>
               </a:rPr>
               <a:t>2</a:t>
             </a:r>
@@ -11018,9 +11018,9 @@
                 <a:solidFill>
                   <a:srgbClr val="2D3436"/>
                 </a:solidFill>
-                <a:latin typeface="Arial" pitchFamily="34" charset="0"/>
-                <a:ea typeface="Arial" pitchFamily="34" charset="-122"/>
-                <a:cs typeface="Arial" pitchFamily="34" charset="-120"/>
+                <a:latin typeface="BIZ UDPGothic" pitchFamily="34" charset="0"/>
+                <a:ea typeface="BIZ UDPGothic" pitchFamily="34" charset="-122"/>
+                <a:cs typeface="BIZ UDPGothic" pitchFamily="34" charset="-120"/>
               </a:rPr>
               <a:t>「てんかん＝全身けいれん」</a:t>
             </a:r>
@@ -11035,9 +11035,9 @@
                 <a:solidFill>
                   <a:srgbClr val="2D3436"/>
                 </a:solidFill>
-                <a:latin typeface="Arial" pitchFamily="34" charset="0"/>
-                <a:ea typeface="Arial" pitchFamily="34" charset="-122"/>
-                <a:cs typeface="Arial" pitchFamily="34" charset="-120"/>
+                <a:latin typeface="BIZ UDPGothic" pitchFamily="34" charset="0"/>
+                <a:ea typeface="BIZ UDPGothic" pitchFamily="34" charset="-122"/>
+                <a:cs typeface="BIZ UDPGothic" pitchFamily="34" charset="-120"/>
               </a:rPr>
               <a:t>のイメージ</a:t>
             </a:r>
@@ -11074,9 +11074,9 @@
                 <a:solidFill>
                   <a:srgbClr val="636E72"/>
                 </a:solidFill>
-                <a:latin typeface="Arial" pitchFamily="34" charset="0"/>
-                <a:ea typeface="Arial" pitchFamily="34" charset="-122"/>
-                <a:cs typeface="Arial" pitchFamily="34" charset="-120"/>
+                <a:latin typeface="BIZ UDPGothic" pitchFamily="34" charset="0"/>
+                <a:ea typeface="BIZ UDPGothic" pitchFamily="34" charset="-122"/>
+                <a:cs typeface="BIZ UDPGothic" pitchFamily="34" charset="-120"/>
               </a:rPr>
               <a:t>ピクつきでは受診しない</a:t>
             </a:r>
@@ -11160,9 +11160,9 @@
                 <a:solidFill>
                   <a:srgbClr val="FFFFFF"/>
                 </a:solidFill>
-                <a:latin typeface="Arial Black" pitchFamily="34" charset="0"/>
-                <a:ea typeface="Arial Black" pitchFamily="34" charset="-122"/>
-                <a:cs typeface="Arial Black" pitchFamily="34" charset="-120"/>
+                <a:latin typeface="BIZ UDPGothic" pitchFamily="34" charset="0"/>
+                <a:ea typeface="BIZ UDPGothic" pitchFamily="34" charset="-122"/>
+                <a:cs typeface="BIZ UDPGothic" pitchFamily="34" charset="-120"/>
               </a:rPr>
               <a:t>3</a:t>
             </a:r>
@@ -11199,9 +11199,9 @@
                 <a:solidFill>
                   <a:srgbClr val="2D3436"/>
                 </a:solidFill>
-                <a:latin typeface="Arial" pitchFamily="34" charset="0"/>
-                <a:ea typeface="Arial" pitchFamily="34" charset="-122"/>
-                <a:cs typeface="Arial" pitchFamily="34" charset="-120"/>
+                <a:latin typeface="BIZ UDPGothic" pitchFamily="34" charset="0"/>
+                <a:ea typeface="BIZ UDPGothic" pitchFamily="34" charset="-122"/>
+                <a:cs typeface="BIZ UDPGothic" pitchFamily="34" charset="-120"/>
               </a:rPr>
               <a:t>医師がミオクロニーの</a:t>
             </a:r>
@@ -11216,9 +11216,9 @@
                 <a:solidFill>
                   <a:srgbClr val="2D3436"/>
                 </a:solidFill>
-                <a:latin typeface="Arial" pitchFamily="34" charset="0"/>
-                <a:ea typeface="Arial" pitchFamily="34" charset="-122"/>
-                <a:cs typeface="Arial" pitchFamily="34" charset="-120"/>
+                <a:latin typeface="BIZ UDPGothic" pitchFamily="34" charset="0"/>
+                <a:ea typeface="BIZ UDPGothic" pitchFamily="34" charset="-122"/>
+                <a:cs typeface="BIZ UDPGothic" pitchFamily="34" charset="-120"/>
               </a:rPr>
               <a:t>既往を聴取し忘れる</a:t>
             </a:r>
@@ -11255,9 +11255,9 @@
                 <a:solidFill>
                   <a:srgbClr val="636E72"/>
                 </a:solidFill>
-                <a:latin typeface="Arial" pitchFamily="34" charset="0"/>
-                <a:ea typeface="Arial" pitchFamily="34" charset="-122"/>
-                <a:cs typeface="Arial" pitchFamily="34" charset="-120"/>
+                <a:latin typeface="BIZ UDPGothic" pitchFamily="34" charset="0"/>
+                <a:ea typeface="BIZ UDPGothic" pitchFamily="34" charset="-122"/>
+                <a:cs typeface="BIZ UDPGothic" pitchFamily="34" charset="-120"/>
               </a:rPr>
               <a:t>GTCSだけを診断してしまう</a:t>
             </a:r>
@@ -11294,9 +11294,9 @@
                 <a:solidFill>
                   <a:srgbClr val="636E72"/>
                 </a:solidFill>
-                <a:latin typeface="Arial" pitchFamily="34" charset="0"/>
-                <a:ea typeface="Arial" pitchFamily="34" charset="-122"/>
-                <a:cs typeface="Arial" pitchFamily="34" charset="-120"/>
+                <a:latin typeface="BIZ UDPGothic" pitchFamily="34" charset="0"/>
+                <a:ea typeface="BIZ UDPGothic" pitchFamily="34" charset="-122"/>
+                <a:cs typeface="BIZ UDPGothic" pitchFamily="34" charset="-120"/>
               </a:rPr>
               <a:t>5/15</a:t>
             </a:r>
@@ -11381,17 +11381,17 @@
               <a:buNone/>
             </a:pPr>
             <a:r>
-              <a:rPr lang="en-US" sz="2800" b="1" dirty="0">
+              <a:rPr lang="en-US" sz="2400" b="1" dirty="0">
                 <a:solidFill>
                   <a:srgbClr val="FFFFFF"/>
                 </a:solidFill>
-                <a:latin typeface="Arial Black" pitchFamily="34" charset="0"/>
-                <a:ea typeface="Arial Black" pitchFamily="34" charset="-122"/>
-                <a:cs typeface="Arial Black" pitchFamily="34" charset="-120"/>
+                <a:latin typeface="BIZ UDPGothic" pitchFamily="34" charset="0"/>
+                <a:ea typeface="BIZ UDPGothic" pitchFamily="34" charset="-122"/>
+                <a:cs typeface="BIZ UDPGothic" pitchFamily="34" charset="-120"/>
               </a:rPr>
               <a:t>JMEを拾い上げる問診テクニック</a:t>
             </a:r>
-            <a:endParaRPr lang="en-US" sz="2800" dirty="0"/>
+            <a:endParaRPr lang="en-US" sz="2400" dirty="0"/>
           </a:p>
         </p:txBody>
       </p:sp>
@@ -11451,9 +11451,9 @@
                 <a:solidFill>
                   <a:srgbClr val="2C5AA0"/>
                 </a:solidFill>
-                <a:latin typeface="Arial Black" pitchFamily="34" charset="0"/>
-                <a:ea typeface="Arial Black" pitchFamily="34" charset="-122"/>
-                <a:cs typeface="Arial Black" pitchFamily="34" charset="-120"/>
+                <a:latin typeface="BIZ UDPGothic" pitchFamily="34" charset="0"/>
+                <a:ea typeface="BIZ UDPGothic" pitchFamily="34" charset="-122"/>
+                <a:cs typeface="BIZ UDPGothic" pitchFamily="34" charset="-120"/>
               </a:rPr>
               <a:t>GTCSで受診した思春期〜若年成人に聞く！</a:t>
             </a:r>
@@ -11530,9 +11530,9 @@
                 <a:solidFill>
                   <a:srgbClr val="2D3436"/>
                 </a:solidFill>
-                <a:latin typeface="Arial" pitchFamily="34" charset="0"/>
-                <a:ea typeface="Arial" pitchFamily="34" charset="-122"/>
-                <a:cs typeface="Arial" pitchFamily="34" charset="-120"/>
+                <a:latin typeface="BIZ UDPGothic" pitchFamily="34" charset="0"/>
+                <a:ea typeface="BIZ UDPGothic" pitchFamily="34" charset="-122"/>
+                <a:cs typeface="BIZ UDPGothic" pitchFamily="34" charset="-120"/>
               </a:rPr>
               <a:t>「朝起きてすぐ、コップや携帯を落としたことは？」</a:t>
             </a:r>
@@ -11609,9 +11609,9 @@
                 <a:solidFill>
                   <a:srgbClr val="2D3436"/>
                 </a:solidFill>
-                <a:latin typeface="Arial" pitchFamily="34" charset="0"/>
-                <a:ea typeface="Arial" pitchFamily="34" charset="-122"/>
-                <a:cs typeface="Arial" pitchFamily="34" charset="-120"/>
+                <a:latin typeface="BIZ UDPGothic" pitchFamily="34" charset="0"/>
+                <a:ea typeface="BIZ UDPGothic" pitchFamily="34" charset="-122"/>
+                <a:cs typeface="BIZ UDPGothic" pitchFamily="34" charset="-120"/>
               </a:rPr>
               <a:t>「朝食のとき、箸やスプーンが飛んだことは？」</a:t>
             </a:r>
@@ -11688,9 +11688,9 @@
                 <a:solidFill>
                   <a:srgbClr val="2D3436"/>
                 </a:solidFill>
-                <a:latin typeface="Arial" pitchFamily="34" charset="0"/>
-                <a:ea typeface="Arial" pitchFamily="34" charset="-122"/>
-                <a:cs typeface="Arial" pitchFamily="34" charset="-120"/>
+                <a:latin typeface="BIZ UDPGothic" pitchFamily="34" charset="0"/>
+                <a:ea typeface="BIZ UDPGothic" pitchFamily="34" charset="-122"/>
+                <a:cs typeface="BIZ UDPGothic" pitchFamily="34" charset="-120"/>
               </a:rPr>
               <a:t>「体がビクッとなって、周囲の人に指摘されたことは？」</a:t>
             </a:r>
@@ -11747,9 +11747,9 @@
                 <a:solidFill>
                   <a:srgbClr val="FFFFFF"/>
                 </a:solidFill>
-                <a:latin typeface="Arial Black" pitchFamily="34" charset="0"/>
-                <a:ea typeface="Arial Black" pitchFamily="34" charset="-122"/>
-                <a:cs typeface="Arial Black" pitchFamily="34" charset="-120"/>
+                <a:latin typeface="BIZ UDPGothic" pitchFamily="34" charset="0"/>
+                <a:ea typeface="BIZ UDPGothic" pitchFamily="34" charset="-122"/>
+                <a:cs typeface="BIZ UDPGothic" pitchFamily="34" charset="-120"/>
               </a:rPr>
               <a:t>→「今思えば…」と答える患者は非常に多い！</a:t>
             </a:r>
@@ -11786,9 +11786,9 @@
                 <a:solidFill>
                   <a:srgbClr val="636E72"/>
                 </a:solidFill>
-                <a:latin typeface="Arial" pitchFamily="34" charset="0"/>
-                <a:ea typeface="Arial" pitchFamily="34" charset="-122"/>
-                <a:cs typeface="Arial" pitchFamily="34" charset="-120"/>
+                <a:latin typeface="BIZ UDPGothic" pitchFamily="34" charset="0"/>
+                <a:ea typeface="BIZ UDPGothic" pitchFamily="34" charset="-122"/>
+                <a:cs typeface="BIZ UDPGothic" pitchFamily="34" charset="-120"/>
               </a:rPr>
               <a:t>6/15</a:t>
             </a:r>
@@ -11873,17 +11873,17 @@
               <a:buNone/>
             </a:pPr>
             <a:r>
-              <a:rPr lang="en-US" sz="2800" b="1" dirty="0">
+              <a:rPr lang="en-US" sz="2400" b="1" dirty="0">
                 <a:solidFill>
                   <a:srgbClr val="FFFFFF"/>
                 </a:solidFill>
-                <a:latin typeface="Arial Black" pitchFamily="34" charset="0"/>
-                <a:ea typeface="Arial Black" pitchFamily="34" charset="-122"/>
-                <a:cs typeface="Arial Black" pitchFamily="34" charset="-120"/>
+                <a:latin typeface="BIZ UDPGothic" pitchFamily="34" charset="0"/>
+                <a:ea typeface="BIZ UDPGothic" pitchFamily="34" charset="-122"/>
+                <a:cs typeface="BIZ UDPGothic" pitchFamily="34" charset="-120"/>
               </a:rPr>
               <a:t>脳波所見 ― 4〜6Hz多棘徐波</a:t>
             </a:r>
-            <a:endParaRPr lang="en-US" sz="2800" dirty="0"/>
+            <a:endParaRPr lang="en-US" sz="2400" dirty="0"/>
           </a:p>
         </p:txBody>
       </p:sp>
@@ -11943,9 +11943,9 @@
                 <a:solidFill>
                   <a:srgbClr val="2C5AA0"/>
                 </a:solidFill>
-                <a:latin typeface="Arial Black" pitchFamily="34" charset="0"/>
-                <a:ea typeface="Arial Black" pitchFamily="34" charset="-122"/>
-                <a:cs typeface="Arial Black" pitchFamily="34" charset="-120"/>
+                <a:latin typeface="BIZ UDPGothic" pitchFamily="34" charset="0"/>
+                <a:ea typeface="BIZ UDPGothic" pitchFamily="34" charset="-122"/>
+                <a:cs typeface="BIZ UDPGothic" pitchFamily="34" charset="-120"/>
               </a:rPr>
               <a:t>JME脳波の特徴</a:t>
             </a:r>
@@ -11982,9 +11982,9 @@
                 <a:solidFill>
                   <a:srgbClr val="2D3436"/>
                 </a:solidFill>
-                <a:latin typeface="Arial Black" pitchFamily="34" charset="0"/>
-                <a:ea typeface="Arial Black" pitchFamily="34" charset="-122"/>
-                <a:cs typeface="Arial Black" pitchFamily="34" charset="-120"/>
+                <a:latin typeface="BIZ UDPGothic" pitchFamily="34" charset="0"/>
+                <a:ea typeface="BIZ UDPGothic" pitchFamily="34" charset="-122"/>
+                <a:cs typeface="BIZ UDPGothic" pitchFamily="34" charset="-120"/>
               </a:rPr>
               <a:t>基礎律動</a:t>
             </a:r>
@@ -12021,9 +12021,9 @@
                 <a:solidFill>
                   <a:srgbClr val="636E72"/>
                 </a:solidFill>
-                <a:latin typeface="Arial" pitchFamily="34" charset="0"/>
-                <a:ea typeface="Arial" pitchFamily="34" charset="-122"/>
-                <a:cs typeface="Arial" pitchFamily="34" charset="-120"/>
+                <a:latin typeface="BIZ UDPGothic" pitchFamily="34" charset="0"/>
+                <a:ea typeface="BIZ UDPGothic" pitchFamily="34" charset="-122"/>
+                <a:cs typeface="BIZ UDPGothic" pitchFamily="34" charset="-120"/>
               </a:rPr>
               <a:t>正常</a:t>
             </a:r>
@@ -12060,9 +12060,9 @@
                 <a:solidFill>
                   <a:srgbClr val="2D3436"/>
                 </a:solidFill>
-                <a:latin typeface="Arial Black" pitchFamily="34" charset="0"/>
-                <a:ea typeface="Arial Black" pitchFamily="34" charset="-122"/>
-                <a:cs typeface="Arial Black" pitchFamily="34" charset="-120"/>
+                <a:latin typeface="BIZ UDPGothic" pitchFamily="34" charset="0"/>
+                <a:ea typeface="BIZ UDPGothic" pitchFamily="34" charset="-122"/>
+                <a:cs typeface="BIZ UDPGothic" pitchFamily="34" charset="-120"/>
               </a:rPr>
               <a:t>発作間欠期</a:t>
             </a:r>
@@ -12099,9 +12099,9 @@
                 <a:solidFill>
                   <a:srgbClr val="636E72"/>
                 </a:solidFill>
-                <a:latin typeface="Arial" pitchFamily="34" charset="0"/>
-                <a:ea typeface="Arial" pitchFamily="34" charset="-122"/>
-                <a:cs typeface="Arial" pitchFamily="34" charset="-120"/>
+                <a:latin typeface="BIZ UDPGothic" pitchFamily="34" charset="0"/>
+                <a:ea typeface="BIZ UDPGothic" pitchFamily="34" charset="-122"/>
+                <a:cs typeface="BIZ UDPGothic" pitchFamily="34" charset="-120"/>
               </a:rPr>
               <a:t>4〜6Hz 多棘徐波複合</a:t>
             </a:r>
@@ -12116,9 +12116,9 @@
                 <a:solidFill>
                   <a:srgbClr val="636E72"/>
                 </a:solidFill>
-                <a:latin typeface="Arial" pitchFamily="34" charset="0"/>
-                <a:ea typeface="Arial" pitchFamily="34" charset="-122"/>
-                <a:cs typeface="Arial" pitchFamily="34" charset="-120"/>
+                <a:latin typeface="BIZ UDPGothic" pitchFamily="34" charset="0"/>
+                <a:ea typeface="BIZ UDPGothic" pitchFamily="34" charset="-122"/>
+                <a:cs typeface="BIZ UDPGothic" pitchFamily="34" charset="-120"/>
               </a:rPr>
               <a:t>(polyspike-and-slow wave)</a:t>
             </a:r>
@@ -12155,9 +12155,9 @@
                 <a:solidFill>
                   <a:srgbClr val="2D3436"/>
                 </a:solidFill>
-                <a:latin typeface="Arial Black" pitchFamily="34" charset="0"/>
-                <a:ea typeface="Arial Black" pitchFamily="34" charset="-122"/>
-                <a:cs typeface="Arial Black" pitchFamily="34" charset="-120"/>
+                <a:latin typeface="BIZ UDPGothic" pitchFamily="34" charset="0"/>
+                <a:ea typeface="BIZ UDPGothic" pitchFamily="34" charset="-122"/>
+                <a:cs typeface="BIZ UDPGothic" pitchFamily="34" charset="-120"/>
               </a:rPr>
               <a:t>分布</a:t>
             </a:r>
@@ -12194,9 +12194,9 @@
                 <a:solidFill>
                   <a:srgbClr val="636E72"/>
                 </a:solidFill>
-                <a:latin typeface="Arial" pitchFamily="34" charset="0"/>
-                <a:ea typeface="Arial" pitchFamily="34" charset="-122"/>
-                <a:cs typeface="Arial" pitchFamily="34" charset="-120"/>
+                <a:latin typeface="BIZ UDPGothic" pitchFamily="34" charset="0"/>
+                <a:ea typeface="BIZ UDPGothic" pitchFamily="34" charset="-122"/>
+                <a:cs typeface="BIZ UDPGothic" pitchFamily="34" charset="-120"/>
               </a:rPr>
               <a:t>前頭〜中心部優位</a:t>
             </a:r>
@@ -12233,9 +12233,9 @@
                 <a:solidFill>
                   <a:srgbClr val="2D3436"/>
                 </a:solidFill>
-                <a:latin typeface="Arial Black" pitchFamily="34" charset="0"/>
-                <a:ea typeface="Arial Black" pitchFamily="34" charset="-122"/>
-                <a:cs typeface="Arial Black" pitchFamily="34" charset="-120"/>
+                <a:latin typeface="BIZ UDPGothic" pitchFamily="34" charset="0"/>
+                <a:ea typeface="BIZ UDPGothic" pitchFamily="34" charset="-122"/>
+                <a:cs typeface="BIZ UDPGothic" pitchFamily="34" charset="-120"/>
               </a:rPr>
               <a:t>光突発反応</a:t>
             </a:r>
@@ -12272,9 +12272,9 @@
                 <a:solidFill>
                   <a:srgbClr val="636E72"/>
                 </a:solidFill>
-                <a:latin typeface="Arial" pitchFamily="34" charset="0"/>
-                <a:ea typeface="Arial" pitchFamily="34" charset="-122"/>
-                <a:cs typeface="Arial" pitchFamily="34" charset="-120"/>
+                <a:latin typeface="BIZ UDPGothic" pitchFamily="34" charset="0"/>
+                <a:ea typeface="BIZ UDPGothic" pitchFamily="34" charset="-122"/>
+                <a:cs typeface="BIZ UDPGothic" pitchFamily="34" charset="-120"/>
               </a:rPr>
               <a:t>30〜40%に陽性</a:t>
             </a:r>
@@ -12311,9 +12311,9 @@
                 <a:solidFill>
                   <a:srgbClr val="2D3436"/>
                 </a:solidFill>
-                <a:latin typeface="Arial Black" pitchFamily="34" charset="0"/>
-                <a:ea typeface="Arial Black" pitchFamily="34" charset="-122"/>
-                <a:cs typeface="Arial Black" pitchFamily="34" charset="-120"/>
+                <a:latin typeface="BIZ UDPGothic" pitchFamily="34" charset="0"/>
+                <a:ea typeface="BIZ UDPGothic" pitchFamily="34" charset="-122"/>
+                <a:cs typeface="BIZ UDPGothic" pitchFamily="34" charset="-120"/>
               </a:rPr>
               <a:t>感度向上</a:t>
             </a:r>
@@ -12350,9 +12350,9 @@
                 <a:solidFill>
                   <a:srgbClr val="636E72"/>
                 </a:solidFill>
-                <a:latin typeface="Arial" pitchFamily="34" charset="0"/>
-                <a:ea typeface="Arial" pitchFamily="34" charset="-122"/>
-                <a:cs typeface="Arial" pitchFamily="34" charset="-120"/>
+                <a:latin typeface="BIZ UDPGothic" pitchFamily="34" charset="0"/>
+                <a:ea typeface="BIZ UDPGothic" pitchFamily="34" charset="-122"/>
+                <a:cs typeface="BIZ UDPGothic" pitchFamily="34" charset="-120"/>
               </a:rPr>
               <a:t>睡眠剥奪脳波を推奨</a:t>
             </a:r>
@@ -12436,9 +12436,9 @@
                 <a:solidFill>
                   <a:srgbClr val="FFFFFF"/>
                 </a:solidFill>
-                <a:latin typeface="Arial Black" pitchFamily="34" charset="0"/>
-                <a:ea typeface="Arial Black" pitchFamily="34" charset="-122"/>
-                <a:cs typeface="Arial Black" pitchFamily="34" charset="-120"/>
+                <a:latin typeface="BIZ UDPGothic" pitchFamily="34" charset="0"/>
+                <a:ea typeface="BIZ UDPGothic" pitchFamily="34" charset="-122"/>
+                <a:cs typeface="BIZ UDPGothic" pitchFamily="34" charset="-120"/>
               </a:rPr>
               <a:t>鑑別ポイント</a:t>
             </a:r>
@@ -12475,9 +12475,9 @@
                 <a:solidFill>
                   <a:srgbClr val="2D3436"/>
                 </a:solidFill>
-                <a:latin typeface="Arial" pitchFamily="34" charset="0"/>
-                <a:ea typeface="Arial" pitchFamily="34" charset="-122"/>
-                <a:cs typeface="Arial" pitchFamily="34" charset="-120"/>
+                <a:latin typeface="BIZ UDPGothic" pitchFamily="34" charset="0"/>
+                <a:ea typeface="BIZ UDPGothic" pitchFamily="34" charset="-122"/>
+                <a:cs typeface="BIZ UDPGothic" pitchFamily="34" charset="-120"/>
               </a:rPr>
               <a:t>定型欠神:</a:t>
             </a:r>
@@ -12492,9 +12492,9 @@
                 <a:solidFill>
                   <a:srgbClr val="636E72"/>
                 </a:solidFill>
-                <a:latin typeface="Arial" pitchFamily="34" charset="0"/>
-                <a:ea typeface="Arial" pitchFamily="34" charset="-122"/>
-                <a:cs typeface="Arial" pitchFamily="34" charset="-120"/>
+                <a:latin typeface="BIZ UDPGothic" pitchFamily="34" charset="0"/>
+                <a:ea typeface="BIZ UDPGothic" pitchFamily="34" charset="-122"/>
+                <a:cs typeface="BIZ UDPGothic" pitchFamily="34" charset="-120"/>
               </a:rPr>
               <a:t>3Hz 棘徐波</a:t>
             </a:r>
@@ -12515,9 +12515,9 @@
                 <a:solidFill>
                   <a:srgbClr val="2D3436"/>
                 </a:solidFill>
-                <a:latin typeface="Arial" pitchFamily="34" charset="0"/>
-                <a:ea typeface="Arial" pitchFamily="34" charset="-122"/>
-                <a:cs typeface="Arial" pitchFamily="34" charset="-120"/>
+                <a:latin typeface="BIZ UDPGothic" pitchFamily="34" charset="0"/>
+                <a:ea typeface="BIZ UDPGothic" pitchFamily="34" charset="-122"/>
+                <a:cs typeface="BIZ UDPGothic" pitchFamily="34" charset="-120"/>
               </a:rPr>
               <a:t>JME:</a:t>
             </a:r>
@@ -12532,9 +12532,9 @@
                 <a:solidFill>
                   <a:srgbClr val="DC3545"/>
                 </a:solidFill>
-                <a:latin typeface="Arial" pitchFamily="34" charset="0"/>
-                <a:ea typeface="Arial" pitchFamily="34" charset="-122"/>
-                <a:cs typeface="Arial" pitchFamily="34" charset="-120"/>
+                <a:latin typeface="BIZ UDPGothic" pitchFamily="34" charset="0"/>
+                <a:ea typeface="BIZ UDPGothic" pitchFamily="34" charset="-122"/>
+                <a:cs typeface="BIZ UDPGothic" pitchFamily="34" charset="-120"/>
               </a:rPr>
               <a:t>4〜6Hz 多棘徐波</a:t>
             </a:r>
@@ -12555,9 +12555,9 @@
                 <a:solidFill>
                   <a:srgbClr val="2D3436"/>
                 </a:solidFill>
-                <a:latin typeface="Arial" pitchFamily="34" charset="0"/>
-                <a:ea typeface="Arial" pitchFamily="34" charset="-122"/>
-                <a:cs typeface="Arial" pitchFamily="34" charset="-120"/>
+                <a:latin typeface="BIZ UDPGothic" pitchFamily="34" charset="0"/>
+                <a:ea typeface="BIZ UDPGothic" pitchFamily="34" charset="-122"/>
+                <a:cs typeface="BIZ UDPGothic" pitchFamily="34" charset="-120"/>
               </a:rPr>
               <a:t>「多棘」= 1つの徐波に</a:t>
             </a:r>
@@ -12572,9 +12572,9 @@
                 <a:solidFill>
                   <a:srgbClr val="2D3436"/>
                 </a:solidFill>
-                <a:latin typeface="Arial" pitchFamily="34" charset="0"/>
-                <a:ea typeface="Arial" pitchFamily="34" charset="-122"/>
-                <a:cs typeface="Arial" pitchFamily="34" charset="-120"/>
+                <a:latin typeface="BIZ UDPGothic" pitchFamily="34" charset="0"/>
+                <a:ea typeface="BIZ UDPGothic" pitchFamily="34" charset="-122"/>
+                <a:cs typeface="BIZ UDPGothic" pitchFamily="34" charset="-120"/>
               </a:rPr>
               <a:t>先行する複数の棘波</a:t>
             </a:r>
@@ -12589,9 +12589,9 @@
                 <a:solidFill>
                   <a:srgbClr val="2D3436"/>
                 </a:solidFill>
-                <a:latin typeface="Arial" pitchFamily="34" charset="0"/>
-                <a:ea typeface="Arial" pitchFamily="34" charset="-122"/>
-                <a:cs typeface="Arial" pitchFamily="34" charset="-120"/>
+                <a:latin typeface="BIZ UDPGothic" pitchFamily="34" charset="0"/>
+                <a:ea typeface="BIZ UDPGothic" pitchFamily="34" charset="-122"/>
+                <a:cs typeface="BIZ UDPGothic" pitchFamily="34" charset="-120"/>
               </a:rPr>
               <a:t>→ ミオクロニー発作の</a:t>
             </a:r>
@@ -12606,9 +12606,9 @@
                 <a:solidFill>
                   <a:srgbClr val="2D3436"/>
                 </a:solidFill>
-                <a:latin typeface="Arial" pitchFamily="34" charset="0"/>
-                <a:ea typeface="Arial" pitchFamily="34" charset="-122"/>
-                <a:cs typeface="Arial" pitchFamily="34" charset="-120"/>
+                <a:latin typeface="BIZ UDPGothic" pitchFamily="34" charset="0"/>
+                <a:ea typeface="BIZ UDPGothic" pitchFamily="34" charset="-122"/>
+                <a:cs typeface="BIZ UDPGothic" pitchFamily="34" charset="-120"/>
               </a:rPr>
               <a:t>電気生理学的対応物</a:t>
             </a:r>
@@ -12645,9 +12645,9 @@
                 <a:solidFill>
                   <a:srgbClr val="636E72"/>
                 </a:solidFill>
-                <a:latin typeface="Arial" pitchFamily="34" charset="0"/>
-                <a:ea typeface="Arial" pitchFamily="34" charset="-122"/>
-                <a:cs typeface="Arial" pitchFamily="34" charset="-120"/>
+                <a:latin typeface="BIZ UDPGothic" pitchFamily="34" charset="0"/>
+                <a:ea typeface="BIZ UDPGothic" pitchFamily="34" charset="-122"/>
+                <a:cs typeface="BIZ UDPGothic" pitchFamily="34" charset="-120"/>
               </a:rPr>
               <a:t>7/15</a:t>
             </a:r>
@@ -12732,17 +12732,17 @@
               <a:buNone/>
             </a:pPr>
             <a:r>
-              <a:rPr lang="en-US" sz="2800" b="1" dirty="0">
+              <a:rPr lang="en-US" sz="2400" b="1" dirty="0">
                 <a:solidFill>
                   <a:srgbClr val="FFFFFF"/>
                 </a:solidFill>
-                <a:latin typeface="Arial Black" pitchFamily="34" charset="0"/>
-                <a:ea typeface="Arial Black" pitchFamily="34" charset="-122"/>
-                <a:cs typeface="Arial Black" pitchFamily="34" charset="-120"/>
+                <a:latin typeface="BIZ UDPGothic" pitchFamily="34" charset="0"/>
+                <a:ea typeface="BIZ UDPGothic" pitchFamily="34" charset="-122"/>
+                <a:cs typeface="BIZ UDPGothic" pitchFamily="34" charset="-120"/>
               </a:rPr>
               <a:t>鑑別診断 ― 特に注意すべき疾患</a:t>
             </a:r>
-            <a:endParaRPr lang="en-US" sz="2800" dirty="0"/>
+            <a:endParaRPr lang="en-US" sz="2400" dirty="0"/>
           </a:p>
         </p:txBody>
       </p:sp>
@@ -12795,9 +12795,9 @@
                 <a:solidFill>
                   <a:srgbClr val="FFFFFF"/>
                 </a:solidFill>
-                <a:latin typeface="Arial Black" pitchFamily="34" charset="0"/>
-                <a:ea typeface="Arial Black" pitchFamily="34" charset="-122"/>
-                <a:cs typeface="Arial Black" pitchFamily="34" charset="-120"/>
+                <a:latin typeface="BIZ UDPGothic" pitchFamily="34" charset="0"/>
+                <a:ea typeface="BIZ UDPGothic" pitchFamily="34" charset="-122"/>
+                <a:cs typeface="BIZ UDPGothic" pitchFamily="34" charset="-120"/>
               </a:rPr>
               <a:t>鑑別疾患</a:t>
             </a:r>
@@ -12834,9 +12834,9 @@
                 <a:solidFill>
                   <a:srgbClr val="FFFFFF"/>
                 </a:solidFill>
-                <a:latin typeface="Arial Black" pitchFamily="34" charset="0"/>
-                <a:ea typeface="Arial Black" pitchFamily="34" charset="-122"/>
-                <a:cs typeface="Arial Black" pitchFamily="34" charset="-120"/>
+                <a:latin typeface="BIZ UDPGothic" pitchFamily="34" charset="0"/>
+                <a:ea typeface="BIZ UDPGothic" pitchFamily="34" charset="-122"/>
+                <a:cs typeface="BIZ UDPGothic" pitchFamily="34" charset="-120"/>
               </a:rPr>
               <a:t>共通点</a:t>
             </a:r>
@@ -12873,9 +12873,9 @@
                 <a:solidFill>
                   <a:srgbClr val="FFFFFF"/>
                 </a:solidFill>
-                <a:latin typeface="Arial Black" pitchFamily="34" charset="0"/>
-                <a:ea typeface="Arial Black" pitchFamily="34" charset="-122"/>
-                <a:cs typeface="Arial Black" pitchFamily="34" charset="-120"/>
+                <a:latin typeface="BIZ UDPGothic" pitchFamily="34" charset="0"/>
+                <a:ea typeface="BIZ UDPGothic" pitchFamily="34" charset="-122"/>
+                <a:cs typeface="BIZ UDPGothic" pitchFamily="34" charset="-120"/>
               </a:rPr>
               <a:t>鑑別のポイント</a:t>
             </a:r>
@@ -12932,9 +12932,9 @@
                 <a:solidFill>
                   <a:srgbClr val="2D3436"/>
                 </a:solidFill>
-                <a:latin typeface="Arial Black" pitchFamily="34" charset="0"/>
-                <a:ea typeface="Arial Black" pitchFamily="34" charset="-122"/>
-                <a:cs typeface="Arial Black" pitchFamily="34" charset="-120"/>
+                <a:latin typeface="BIZ UDPGothic" pitchFamily="34" charset="0"/>
+                <a:ea typeface="BIZ UDPGothic" pitchFamily="34" charset="-122"/>
+                <a:cs typeface="BIZ UDPGothic" pitchFamily="34" charset="-120"/>
               </a:rPr>
               <a:t>若年欠神てんかん</a:t>
             </a:r>
@@ -12949,9 +12949,9 @@
                 <a:solidFill>
                   <a:srgbClr val="2D3436"/>
                 </a:solidFill>
-                <a:latin typeface="Arial Black" pitchFamily="34" charset="0"/>
-                <a:ea typeface="Arial Black" pitchFamily="34" charset="-122"/>
-                <a:cs typeface="Arial Black" pitchFamily="34" charset="-120"/>
+                <a:latin typeface="BIZ UDPGothic" pitchFamily="34" charset="0"/>
+                <a:ea typeface="BIZ UDPGothic" pitchFamily="34" charset="-122"/>
+                <a:cs typeface="BIZ UDPGothic" pitchFamily="34" charset="-120"/>
               </a:rPr>
               <a:t>(JAE)</a:t>
             </a:r>
@@ -12988,9 +12988,9 @@
                 <a:solidFill>
                   <a:srgbClr val="636E72"/>
                 </a:solidFill>
-                <a:latin typeface="Arial" pitchFamily="34" charset="0"/>
-                <a:ea typeface="Arial" pitchFamily="34" charset="-122"/>
-                <a:cs typeface="Arial" pitchFamily="34" charset="-120"/>
+                <a:latin typeface="BIZ UDPGothic" pitchFamily="34" charset="0"/>
+                <a:ea typeface="BIZ UDPGothic" pitchFamily="34" charset="-122"/>
+                <a:cs typeface="BIZ UDPGothic" pitchFamily="34" charset="-120"/>
               </a:rPr>
               <a:t>GGE、思春期発症</a:t>
             </a:r>
@@ -13027,9 +13027,9 @@
                 <a:solidFill>
                   <a:srgbClr val="2D3436"/>
                 </a:solidFill>
-                <a:latin typeface="Arial" pitchFamily="34" charset="0"/>
-                <a:ea typeface="Arial" pitchFamily="34" charset="-122"/>
-                <a:cs typeface="Arial" pitchFamily="34" charset="-120"/>
+                <a:latin typeface="BIZ UDPGothic" pitchFamily="34" charset="0"/>
+                <a:ea typeface="BIZ UDPGothic" pitchFamily="34" charset="-122"/>
+                <a:cs typeface="BIZ UDPGothic" pitchFamily="34" charset="-120"/>
               </a:rPr>
               <a:t>欠神が主体。ミオクロニーは稀</a:t>
             </a:r>
@@ -13044,9 +13044,9 @@
                 <a:solidFill>
                   <a:srgbClr val="2D3436"/>
                 </a:solidFill>
-                <a:latin typeface="Arial" pitchFamily="34" charset="0"/>
-                <a:ea typeface="Arial" pitchFamily="34" charset="-122"/>
-                <a:cs typeface="Arial" pitchFamily="34" charset="-120"/>
+                <a:latin typeface="BIZ UDPGothic" pitchFamily="34" charset="0"/>
+                <a:ea typeface="BIZ UDPGothic" pitchFamily="34" charset="-122"/>
+                <a:cs typeface="BIZ UDPGothic" pitchFamily="34" charset="-120"/>
               </a:rPr>
               <a:t>3Hz棘徐波が典型</a:t>
             </a:r>
@@ -13103,9 +13103,9 @@
                 <a:solidFill>
                   <a:srgbClr val="2D3436"/>
                 </a:solidFill>
-                <a:latin typeface="Arial Black" pitchFamily="34" charset="0"/>
-                <a:ea typeface="Arial Black" pitchFamily="34" charset="-122"/>
-                <a:cs typeface="Arial Black" pitchFamily="34" charset="-120"/>
+                <a:latin typeface="BIZ UDPGothic" pitchFamily="34" charset="0"/>
+                <a:ea typeface="BIZ UDPGothic" pitchFamily="34" charset="-122"/>
+                <a:cs typeface="BIZ UDPGothic" pitchFamily="34" charset="-120"/>
               </a:rPr>
               <a:t>覚醒時GTCS</a:t>
             </a:r>
@@ -13120,9 +13120,9 @@
                 <a:solidFill>
                   <a:srgbClr val="2D3436"/>
                 </a:solidFill>
-                <a:latin typeface="Arial Black" pitchFamily="34" charset="0"/>
-                <a:ea typeface="Arial Black" pitchFamily="34" charset="-122"/>
-                <a:cs typeface="Arial Black" pitchFamily="34" charset="-120"/>
+                <a:latin typeface="BIZ UDPGothic" pitchFamily="34" charset="0"/>
+                <a:ea typeface="BIZ UDPGothic" pitchFamily="34" charset="-122"/>
+                <a:cs typeface="BIZ UDPGothic" pitchFamily="34" charset="-120"/>
               </a:rPr>
               <a:t>単独てんかん</a:t>
             </a:r>
@@ -13159,9 +13159,9 @@
                 <a:solidFill>
                   <a:srgbClr val="636E72"/>
                 </a:solidFill>
-                <a:latin typeface="Arial" pitchFamily="34" charset="0"/>
-                <a:ea typeface="Arial" pitchFamily="34" charset="-122"/>
-                <a:cs typeface="Arial" pitchFamily="34" charset="-120"/>
+                <a:latin typeface="BIZ UDPGothic" pitchFamily="34" charset="0"/>
+                <a:ea typeface="BIZ UDPGothic" pitchFamily="34" charset="-122"/>
+                <a:cs typeface="BIZ UDPGothic" pitchFamily="34" charset="-120"/>
               </a:rPr>
               <a:t>覚醒時のGTCS</a:t>
             </a:r>
@@ -13198,9 +13198,9 @@
                 <a:solidFill>
                   <a:srgbClr val="2D3436"/>
                 </a:solidFill>
-                <a:latin typeface="Arial" pitchFamily="34" charset="0"/>
-                <a:ea typeface="Arial" pitchFamily="34" charset="-122"/>
-                <a:cs typeface="Arial" pitchFamily="34" charset="-120"/>
+                <a:latin typeface="BIZ UDPGothic" pitchFamily="34" charset="0"/>
+                <a:ea typeface="BIZ UDPGothic" pitchFamily="34" charset="-122"/>
+                <a:cs typeface="BIZ UDPGothic" pitchFamily="34" charset="-120"/>
               </a:rPr>
               <a:t>ミオクロニー・欠神なし</a:t>
             </a:r>
@@ -13257,9 +13257,9 @@
                 <a:solidFill>
                   <a:srgbClr val="2D3436"/>
                 </a:solidFill>
-                <a:latin typeface="Arial Black" pitchFamily="34" charset="0"/>
-                <a:ea typeface="Arial Black" pitchFamily="34" charset="-122"/>
-                <a:cs typeface="Arial Black" pitchFamily="34" charset="-120"/>
+                <a:latin typeface="BIZ UDPGothic" pitchFamily="34" charset="0"/>
+                <a:ea typeface="BIZ UDPGothic" pitchFamily="34" charset="-122"/>
+                <a:cs typeface="BIZ UDPGothic" pitchFamily="34" charset="-120"/>
               </a:rPr>
               <a:t>進行性ミオクローヌス</a:t>
             </a:r>
@@ -13274,9 +13274,9 @@
                 <a:solidFill>
                   <a:srgbClr val="2D3436"/>
                 </a:solidFill>
-                <a:latin typeface="Arial Black" pitchFamily="34" charset="0"/>
-                <a:ea typeface="Arial Black" pitchFamily="34" charset="-122"/>
-                <a:cs typeface="Arial Black" pitchFamily="34" charset="-120"/>
+                <a:latin typeface="BIZ UDPGothic" pitchFamily="34" charset="0"/>
+                <a:ea typeface="BIZ UDPGothic" pitchFamily="34" charset="-122"/>
+                <a:cs typeface="BIZ UDPGothic" pitchFamily="34" charset="-120"/>
               </a:rPr>
               <a:t>てんかん (PME)</a:t>
             </a:r>
@@ -13313,9 +13313,9 @@
                 <a:solidFill>
                   <a:srgbClr val="636E72"/>
                 </a:solidFill>
-                <a:latin typeface="Arial" pitchFamily="34" charset="0"/>
-                <a:ea typeface="Arial" pitchFamily="34" charset="-122"/>
-                <a:cs typeface="Arial" pitchFamily="34" charset="-120"/>
+                <a:latin typeface="BIZ UDPGothic" pitchFamily="34" charset="0"/>
+                <a:ea typeface="BIZ UDPGothic" pitchFamily="34" charset="-122"/>
+                <a:cs typeface="BIZ UDPGothic" pitchFamily="34" charset="-120"/>
               </a:rPr>
               <a:t>ミオクロニー、GTCS</a:t>
             </a:r>
@@ -13352,9 +13352,9 @@
                 <a:solidFill>
                   <a:srgbClr val="2D3436"/>
                 </a:solidFill>
-                <a:latin typeface="Arial" pitchFamily="34" charset="0"/>
-                <a:ea typeface="Arial" pitchFamily="34" charset="-122"/>
-                <a:cs typeface="Arial" pitchFamily="34" charset="-120"/>
+                <a:latin typeface="BIZ UDPGothic" pitchFamily="34" charset="0"/>
+                <a:ea typeface="BIZ UDPGothic" pitchFamily="34" charset="-122"/>
+                <a:cs typeface="BIZ UDPGothic" pitchFamily="34" charset="-120"/>
               </a:rPr>
               <a:t>進行性の認知機能低下・小脳失調</a:t>
             </a:r>
@@ -13369,9 +13369,9 @@
                 <a:solidFill>
                   <a:srgbClr val="2D3436"/>
                 </a:solidFill>
-                <a:latin typeface="Arial" pitchFamily="34" charset="0"/>
-                <a:ea typeface="Arial" pitchFamily="34" charset="-122"/>
-                <a:cs typeface="Arial" pitchFamily="34" charset="-120"/>
+                <a:latin typeface="BIZ UDPGothic" pitchFamily="34" charset="0"/>
+                <a:ea typeface="BIZ UDPGothic" pitchFamily="34" charset="-122"/>
+                <a:cs typeface="BIZ UDPGothic" pitchFamily="34" charset="-120"/>
               </a:rPr>
               <a:t>JMEは非進行性</a:t>
             </a:r>
@@ -13428,9 +13428,9 @@
                 <a:solidFill>
                   <a:srgbClr val="2D3436"/>
                 </a:solidFill>
-                <a:latin typeface="Arial Black" pitchFamily="34" charset="0"/>
-                <a:ea typeface="Arial Black" pitchFamily="34" charset="-122"/>
-                <a:cs typeface="Arial Black" pitchFamily="34" charset="-120"/>
+                <a:latin typeface="BIZ UDPGothic" pitchFamily="34" charset="0"/>
+                <a:ea typeface="BIZ UDPGothic" pitchFamily="34" charset="-122"/>
+                <a:cs typeface="BIZ UDPGothic" pitchFamily="34" charset="-120"/>
               </a:rPr>
               <a:t>家族性成人型</a:t>
             </a:r>
@@ -13445,9 +13445,9 @@
                 <a:solidFill>
                   <a:srgbClr val="2D3436"/>
                 </a:solidFill>
-                <a:latin typeface="Arial Black" pitchFamily="34" charset="0"/>
-                <a:ea typeface="Arial Black" pitchFamily="34" charset="-122"/>
-                <a:cs typeface="Arial Black" pitchFamily="34" charset="-120"/>
+                <a:latin typeface="BIZ UDPGothic" pitchFamily="34" charset="0"/>
+                <a:ea typeface="BIZ UDPGothic" pitchFamily="34" charset="-122"/>
+                <a:cs typeface="BIZ UDPGothic" pitchFamily="34" charset="-120"/>
               </a:rPr>
               <a:t>ミオクロニーてんかん</a:t>
             </a:r>
@@ -13484,9 +13484,9 @@
                 <a:solidFill>
                   <a:srgbClr val="636E72"/>
                 </a:solidFill>
-                <a:latin typeface="Arial" pitchFamily="34" charset="0"/>
-                <a:ea typeface="Arial" pitchFamily="34" charset="-122"/>
-                <a:cs typeface="Arial" pitchFamily="34" charset="-120"/>
+                <a:latin typeface="BIZ UDPGothic" pitchFamily="34" charset="0"/>
+                <a:ea typeface="BIZ UDPGothic" pitchFamily="34" charset="-122"/>
+                <a:cs typeface="BIZ UDPGothic" pitchFamily="34" charset="-120"/>
               </a:rPr>
               <a:t>ミオクロニー、GTCS</a:t>
             </a:r>
@@ -13523,9 +13523,9 @@
                 <a:solidFill>
                   <a:srgbClr val="2D3436"/>
                 </a:solidFill>
-                <a:latin typeface="Arial" pitchFamily="34" charset="0"/>
-                <a:ea typeface="Arial" pitchFamily="34" charset="-122"/>
-                <a:cs typeface="Arial" pitchFamily="34" charset="-120"/>
+                <a:latin typeface="BIZ UDPGothic" pitchFamily="34" charset="0"/>
+                <a:ea typeface="BIZ UDPGothic" pitchFamily="34" charset="-122"/>
+                <a:cs typeface="BIZ UDPGothic" pitchFamily="34" charset="-120"/>
               </a:rPr>
               <a:t>AD遺伝。持続性皮質ミオクロニー</a:t>
             </a:r>
@@ -13540,9 +13540,9 @@
                 <a:solidFill>
                   <a:srgbClr val="2D3436"/>
                 </a:solidFill>
-                <a:latin typeface="Arial" pitchFamily="34" charset="0"/>
-                <a:ea typeface="Arial" pitchFamily="34" charset="-122"/>
-                <a:cs typeface="Arial" pitchFamily="34" charset="-120"/>
+                <a:latin typeface="BIZ UDPGothic" pitchFamily="34" charset="0"/>
+                <a:ea typeface="BIZ UDPGothic" pitchFamily="34" charset="-122"/>
+                <a:cs typeface="BIZ UDPGothic" pitchFamily="34" charset="-120"/>
               </a:rPr>
               <a:t>Long-read sequencingで確定</a:t>
             </a:r>
@@ -13599,9 +13599,9 @@
                 <a:solidFill>
                   <a:srgbClr val="2D3436"/>
                 </a:solidFill>
-                <a:latin typeface="Arial Black" pitchFamily="34" charset="0"/>
-                <a:ea typeface="Arial Black" pitchFamily="34" charset="-122"/>
-                <a:cs typeface="Arial Black" pitchFamily="34" charset="-120"/>
+                <a:latin typeface="BIZ UDPGothic" pitchFamily="34" charset="0"/>
+                <a:ea typeface="BIZ UDPGothic" pitchFamily="34" charset="-122"/>
+                <a:cs typeface="BIZ UDPGothic" pitchFamily="34" charset="-120"/>
               </a:rPr>
               <a:t>心因性非てんかん性</a:t>
             </a:r>
@@ -13616,9 +13616,9 @@
                 <a:solidFill>
                   <a:srgbClr val="2D3436"/>
                 </a:solidFill>
-                <a:latin typeface="Arial Black" pitchFamily="34" charset="0"/>
-                <a:ea typeface="Arial Black" pitchFamily="34" charset="-122"/>
-                <a:cs typeface="Arial Black" pitchFamily="34" charset="-120"/>
+                <a:latin typeface="BIZ UDPGothic" pitchFamily="34" charset="0"/>
+                <a:ea typeface="BIZ UDPGothic" pitchFamily="34" charset="-122"/>
+                <a:cs typeface="BIZ UDPGothic" pitchFamily="34" charset="-120"/>
               </a:rPr>
               <a:t>発作 (PNES)</a:t>
             </a:r>
@@ -13655,9 +13655,9 @@
                 <a:solidFill>
                   <a:srgbClr val="636E72"/>
                 </a:solidFill>
-                <a:latin typeface="Arial" pitchFamily="34" charset="0"/>
-                <a:ea typeface="Arial" pitchFamily="34" charset="-122"/>
-                <a:cs typeface="Arial" pitchFamily="34" charset="-120"/>
+                <a:latin typeface="BIZ UDPGothic" pitchFamily="34" charset="0"/>
+                <a:ea typeface="BIZ UDPGothic" pitchFamily="34" charset="-122"/>
+                <a:cs typeface="BIZ UDPGothic" pitchFamily="34" charset="-120"/>
               </a:rPr>
               <a:t>発作性症状</a:t>
             </a:r>
@@ -13694,9 +13694,9 @@
                 <a:solidFill>
                   <a:srgbClr val="2D3436"/>
                 </a:solidFill>
-                <a:latin typeface="Arial" pitchFamily="34" charset="0"/>
-                <a:ea typeface="Arial" pitchFamily="34" charset="-122"/>
-                <a:cs typeface="Arial" pitchFamily="34" charset="-120"/>
+                <a:latin typeface="BIZ UDPGothic" pitchFamily="34" charset="0"/>
+                <a:ea typeface="BIZ UDPGothic" pitchFamily="34" charset="-122"/>
+                <a:cs typeface="BIZ UDPGothic" pitchFamily="34" charset="-120"/>
               </a:rPr>
               <a:t>偽薬剤抵抗性の原因</a:t>
             </a:r>
@@ -13711,9 +13711,9 @@
                 <a:solidFill>
                   <a:srgbClr val="2D3436"/>
                 </a:solidFill>
-                <a:latin typeface="Arial" pitchFamily="34" charset="0"/>
-                <a:ea typeface="Arial" pitchFamily="34" charset="-122"/>
-                <a:cs typeface="Arial" pitchFamily="34" charset="-120"/>
+                <a:latin typeface="BIZ UDPGothic" pitchFamily="34" charset="0"/>
+                <a:ea typeface="BIZ UDPGothic" pitchFamily="34" charset="-122"/>
+                <a:cs typeface="BIZ UDPGothic" pitchFamily="34" charset="-120"/>
               </a:rPr>
               <a:t>精神的併存症の評価重要</a:t>
             </a:r>
@@ -13750,9 +13750,9 @@
                 <a:solidFill>
                   <a:srgbClr val="636E72"/>
                 </a:solidFill>
-                <a:latin typeface="Arial" pitchFamily="34" charset="0"/>
-                <a:ea typeface="Arial" pitchFamily="34" charset="-122"/>
-                <a:cs typeface="Arial" pitchFamily="34" charset="-120"/>
+                <a:latin typeface="BIZ UDPGothic" pitchFamily="34" charset="0"/>
+                <a:ea typeface="BIZ UDPGothic" pitchFamily="34" charset="-122"/>
+                <a:cs typeface="BIZ UDPGothic" pitchFamily="34" charset="-120"/>
               </a:rPr>
               <a:t>8/15</a:t>
             </a:r>
@@ -13837,17 +13837,17 @@
               <a:buNone/>
             </a:pPr>
             <a:r>
-              <a:rPr lang="en-US" sz="2800" b="1" dirty="0">
+              <a:rPr lang="en-US" sz="2400" b="1" dirty="0">
                 <a:solidFill>
                   <a:srgbClr val="FFFFFF"/>
                 </a:solidFill>
-                <a:latin typeface="Arial Black" pitchFamily="34" charset="0"/>
-                <a:ea typeface="Arial Black" pitchFamily="34" charset="-122"/>
-                <a:cs typeface="Arial Black" pitchFamily="34" charset="-120"/>
+                <a:latin typeface="BIZ UDPGothic" pitchFamily="34" charset="0"/>
+                <a:ea typeface="BIZ UDPGothic" pitchFamily="34" charset="-122"/>
+                <a:cs typeface="BIZ UDPGothic" pitchFamily="34" charset="-120"/>
               </a:rPr>
               <a:t>治療 ― 第一選択薬（2025年エビデンス）</a:t>
             </a:r>
-            <a:endParaRPr lang="en-US" sz="2800" dirty="0"/>
+            <a:endParaRPr lang="en-US" sz="2400" dirty="0"/>
           </a:p>
         </p:txBody>
       </p:sp>
@@ -13927,9 +13927,9 @@
                 <a:solidFill>
                   <a:srgbClr val="FFFFFF"/>
                 </a:solidFill>
-                <a:latin typeface="Arial Black" pitchFamily="34" charset="0"/>
-                <a:ea typeface="Arial Black" pitchFamily="34" charset="-122"/>
-                <a:cs typeface="Arial Black" pitchFamily="34" charset="-120"/>
+                <a:latin typeface="BIZ UDPGothic" pitchFamily="34" charset="0"/>
+                <a:ea typeface="BIZ UDPGothic" pitchFamily="34" charset="-122"/>
+                <a:cs typeface="BIZ UDPGothic" pitchFamily="34" charset="-120"/>
               </a:rPr>
               <a:t>バルプロ酸（VPA）</a:t>
             </a:r>
@@ -13969,9 +13969,9 @@
                 <a:solidFill>
                   <a:srgbClr val="2C5AA0"/>
                 </a:solidFill>
-                <a:latin typeface="Arial" pitchFamily="34" charset="0"/>
-                <a:ea typeface="Arial" pitchFamily="34" charset="-122"/>
-                <a:cs typeface="Arial" pitchFamily="34" charset="-120"/>
+                <a:latin typeface="BIZ UDPGothic" pitchFamily="34" charset="0"/>
+                <a:ea typeface="BIZ UDPGothic" pitchFamily="34" charset="-122"/>
+                <a:cs typeface="BIZ UDPGothic" pitchFamily="34" charset="-120"/>
               </a:rPr>
               <a:t>最も有効</a:t>
             </a:r>
@@ -13989,9 +13989,9 @@
                 <a:solidFill>
                   <a:srgbClr val="2D3436"/>
                 </a:solidFill>
-                <a:latin typeface="Arial" pitchFamily="34" charset="0"/>
-                <a:ea typeface="Arial" pitchFamily="34" charset="-122"/>
-                <a:cs typeface="Arial" pitchFamily="34" charset="-120"/>
+                <a:latin typeface="BIZ UDPGothic" pitchFamily="34" charset="0"/>
+                <a:ea typeface="BIZ UDPGothic" pitchFamily="34" charset="-122"/>
+                <a:cs typeface="BIZ UDPGothic" pitchFamily="34" charset="-120"/>
               </a:rPr>
               <a:t>単剤で最大90%発作抑制</a:t>
             </a:r>
@@ -14018,9 +14018,9 @@
                 <a:solidFill>
                   <a:srgbClr val="DC3545"/>
                 </a:solidFill>
-                <a:latin typeface="Arial" pitchFamily="34" charset="0"/>
-                <a:ea typeface="Arial" pitchFamily="34" charset="-122"/>
-                <a:cs typeface="Arial" pitchFamily="34" charset="-120"/>
+                <a:latin typeface="BIZ UDPGothic" pitchFamily="34" charset="0"/>
+                <a:ea typeface="BIZ UDPGothic" pitchFamily="34" charset="-122"/>
+                <a:cs typeface="BIZ UDPGothic" pitchFamily="34" charset="-120"/>
               </a:rPr>
               <a:t>⚠ 催奇形性・神経発達リスク</a:t>
             </a:r>
@@ -14038,9 +14038,9 @@
                 <a:solidFill>
                   <a:srgbClr val="DC3545"/>
                 </a:solidFill>
-                <a:latin typeface="Arial" pitchFamily="34" charset="0"/>
-                <a:ea typeface="Arial" pitchFamily="34" charset="-122"/>
-                <a:cs typeface="Arial" pitchFamily="34" charset="-120"/>
+                <a:latin typeface="BIZ UDPGothic" pitchFamily="34" charset="0"/>
+                <a:ea typeface="BIZ UDPGothic" pitchFamily="34" charset="-122"/>
+                <a:cs typeface="BIZ UDPGothic" pitchFamily="34" charset="-120"/>
               </a:rPr>
               <a:t>→ 妊娠可能女性には原則禁忌</a:t>
             </a:r>
@@ -14058,9 +14058,9 @@
                 <a:solidFill>
                   <a:srgbClr val="636E72"/>
                 </a:solidFill>
-                <a:latin typeface="Arial" pitchFamily="34" charset="0"/>
-                <a:ea typeface="Arial" pitchFamily="34" charset="-122"/>
-                <a:cs typeface="Arial" pitchFamily="34" charset="-120"/>
+                <a:latin typeface="BIZ UDPGothic" pitchFamily="34" charset="0"/>
+                <a:ea typeface="BIZ UDPGothic" pitchFamily="34" charset="-122"/>
+                <a:cs typeface="BIZ UDPGothic" pitchFamily="34" charset="-120"/>
               </a:rPr>
               <a:t>体重増加・OSA悪化にも注意</a:t>
             </a:r>
@@ -14144,9 +14144,9 @@
                 <a:solidFill>
                   <a:srgbClr val="FFFFFF"/>
                 </a:solidFill>
-                <a:latin typeface="Arial Black" pitchFamily="34" charset="0"/>
-                <a:ea typeface="Arial Black" pitchFamily="34" charset="-122"/>
-                <a:cs typeface="Arial Black" pitchFamily="34" charset="-120"/>
+                <a:latin typeface="BIZ UDPGothic" pitchFamily="34" charset="0"/>
+                <a:ea typeface="BIZ UDPGothic" pitchFamily="34" charset="-122"/>
+                <a:cs typeface="BIZ UDPGothic" pitchFamily="34" charset="-120"/>
               </a:rPr>
               <a:t>レベチラセタム（LEV）</a:t>
             </a:r>
@@ -14186,9 +14186,9 @@
                 <a:solidFill>
                   <a:srgbClr val="28A745"/>
                 </a:solidFill>
-                <a:latin typeface="Arial" pitchFamily="34" charset="0"/>
-                <a:ea typeface="Arial" pitchFamily="34" charset="-122"/>
-                <a:cs typeface="Arial" pitchFamily="34" charset="-120"/>
+                <a:latin typeface="BIZ UDPGothic" pitchFamily="34" charset="0"/>
+                <a:ea typeface="BIZ UDPGothic" pitchFamily="34" charset="-122"/>
+                <a:cs typeface="BIZ UDPGothic" pitchFamily="34" charset="-120"/>
               </a:rPr>
               <a:t>VPAと同等の有効性</a:t>
             </a:r>
@@ -14206,9 +14206,9 @@
                 <a:solidFill>
                   <a:srgbClr val="2D3436"/>
                 </a:solidFill>
-                <a:latin typeface="Arial" pitchFamily="34" charset="0"/>
-                <a:ea typeface="Arial" pitchFamily="34" charset="-122"/>
-                <a:cs typeface="Arial" pitchFamily="34" charset="-120"/>
+                <a:latin typeface="BIZ UDPGothic" pitchFamily="34" charset="0"/>
+                <a:ea typeface="BIZ UDPGothic" pitchFamily="34" charset="-122"/>
+                <a:cs typeface="BIZ UDPGothic" pitchFamily="34" charset="-120"/>
               </a:rPr>
               <a:t>メタ解析: OR 0.77 (有意差なし)</a:t>
             </a:r>
@@ -14235,9 +14235,9 @@
                 <a:solidFill>
                   <a:srgbClr val="28A745"/>
                 </a:solidFill>
-                <a:latin typeface="Arial" pitchFamily="34" charset="0"/>
-                <a:ea typeface="Arial" pitchFamily="34" charset="-122"/>
-                <a:cs typeface="Arial" pitchFamily="34" charset="-120"/>
+                <a:latin typeface="BIZ UDPGothic" pitchFamily="34" charset="0"/>
+                <a:ea typeface="BIZ UDPGothic" pitchFamily="34" charset="-122"/>
+                <a:cs typeface="BIZ UDPGothic" pitchFamily="34" charset="-120"/>
               </a:rPr>
               <a:t>✅ 妊娠中も比較的安全</a:t>
             </a:r>
@@ -14255,9 +14255,9 @@
                 <a:solidFill>
                   <a:srgbClr val="2C5AA0"/>
                 </a:solidFill>
-                <a:latin typeface="Arial" pitchFamily="34" charset="0"/>
-                <a:ea typeface="Arial" pitchFamily="34" charset="-122"/>
-                <a:cs typeface="Arial" pitchFamily="34" charset="-120"/>
+                <a:latin typeface="BIZ UDPGothic" pitchFamily="34" charset="0"/>
+                <a:ea typeface="BIZ UDPGothic" pitchFamily="34" charset="-122"/>
+                <a:cs typeface="BIZ UDPGothic" pitchFamily="34" charset="-120"/>
               </a:rPr>
               <a:t>5年転帰: LEV優位の可能性</a:t>
             </a:r>
@@ -14275,9 +14275,9 @@
                 <a:solidFill>
                   <a:srgbClr val="E8850C"/>
                 </a:solidFill>
-                <a:latin typeface="Arial" pitchFamily="34" charset="0"/>
-                <a:ea typeface="Arial" pitchFamily="34" charset="-122"/>
-                <a:cs typeface="Arial" pitchFamily="34" charset="-120"/>
+                <a:latin typeface="BIZ UDPGothic" pitchFamily="34" charset="0"/>
+                <a:ea typeface="BIZ UDPGothic" pitchFamily="34" charset="-122"/>
+                <a:cs typeface="BIZ UDPGothic" pitchFamily="34" charset="-120"/>
               </a:rPr>
               <a:t>⚠ 精神症状 37.6%に注意</a:t>
             </a:r>
@@ -14361,9 +14361,9 @@
                 <a:solidFill>
                   <a:srgbClr val="2C5AA0"/>
                 </a:solidFill>
-                <a:latin typeface="Arial" pitchFamily="34" charset="0"/>
-                <a:ea typeface="Arial" pitchFamily="34" charset="-122"/>
-                <a:cs typeface="Arial" pitchFamily="34" charset="-120"/>
+                <a:latin typeface="BIZ UDPGothic" pitchFamily="34" charset="0"/>
+                <a:ea typeface="BIZ UDPGothic" pitchFamily="34" charset="-122"/>
+                <a:cs typeface="BIZ UDPGothic" pitchFamily="34" charset="-120"/>
               </a:rPr>
               <a:t>2025年メタアナリシス (18研究, 2,189例): </a:t>
             </a:r>
@@ -14375,9 +14375,9 @@
                 <a:solidFill>
                   <a:srgbClr val="2D3436"/>
                 </a:solidFill>
-                <a:latin typeface="Arial" pitchFamily="34" charset="0"/>
-                <a:ea typeface="Arial" pitchFamily="34" charset="-122"/>
-                <a:cs typeface="Arial" pitchFamily="34" charset="-120"/>
+                <a:latin typeface="BIZ UDPGothic" pitchFamily="34" charset="0"/>
+                <a:ea typeface="BIZ UDPGothic" pitchFamily="34" charset="-122"/>
+                <a:cs typeface="BIZ UDPGothic" pitchFamily="34" charset="-120"/>
               </a:rPr>
               <a:t>LEV vs VPA → ミオクロニー発作消失率に有意差なし。LEVはLTG (OR 2.22), TPM (OR 1.93)に有意に優位</a:t>
             </a:r>
@@ -14414,9 +14414,9 @@
                 <a:solidFill>
                   <a:srgbClr val="636E72"/>
                 </a:solidFill>
-                <a:latin typeface="Arial" pitchFamily="34" charset="0"/>
-                <a:ea typeface="Arial" pitchFamily="34" charset="-122"/>
-                <a:cs typeface="Arial" pitchFamily="34" charset="-120"/>
+                <a:latin typeface="BIZ UDPGothic" pitchFamily="34" charset="0"/>
+                <a:ea typeface="BIZ UDPGothic" pitchFamily="34" charset="-122"/>
+                <a:cs typeface="BIZ UDPGothic" pitchFamily="34" charset="-120"/>
               </a:rPr>
               <a:t>9/15</a:t>
             </a:r>
